--- a/docs/KD_group_meeting_20260629.pptx
+++ b/docs/KD_group_meeting_20260629.pptx
@@ -3183,6 +3183,9 @@
               <a:lnSpc>
                 <a:spcPct val="105000"/>
               </a:lnSpc>
+              <a:spcBef>
+                <a:spcPts val="0"/>
+              </a:spcBef>
             </a:pPr>
             <a:r>
               <a:rPr sz="5400" b="1" i="0">
@@ -3230,7 +3233,7 @@
                 </a:solidFill>
                 <a:latin typeface="Arial"/>
               </a:rPr>
-              <a:t>Cloud vs Local LLM teachers · SOTA comparison · when KD works</a:t>
+              <a:t>Cloud vs local LLM teachers · SOTA comparison · when KD works</a:t>
             </a:r>
           </a:p>
         </p:txBody>
@@ -3379,7 +3382,7 @@
         <p:spPr>
           <a:xfrm>
             <a:off x="548640" y="777240"/>
-            <a:ext cx="11064240" cy="1005840"/>
+            <a:ext cx="11064240" cy="960120"/>
           </a:xfrm>
           <a:prstGeom prst="rect">
             <a:avLst/>
@@ -3398,7 +3401,7 @@
               </a:lnSpc>
             </a:pPr>
             <a:r>
-              <a:rPr sz="3300" b="1" i="0">
+              <a:rPr sz="3200" b="1" i="0">
                 <a:solidFill>
                   <a:srgbClr val="1A1A1A"/>
                 </a:solidFill>
@@ -3411,107 +3414,20 @@
       </p:sp>
       <p:sp>
         <p:nvSpPr>
-          <p:cNvPr id="4" name="TextBox 3"/>
-          <p:cNvSpPr txBox="1"/>
-          <p:nvPr/>
-        </p:nvSpPr>
-        <p:spPr>
-          <a:xfrm>
-            <a:off x="640080" y="2011680"/>
-            <a:ext cx="10972800" cy="2926080"/>
-          </a:xfrm>
-          <a:prstGeom prst="rect">
-            <a:avLst/>
-          </a:prstGeom>
-          <a:noFill/>
-        </p:spPr>
-        <p:txBody>
-          <a:bodyPr wrap="square" anchor="t">
-            <a:spAutoFit/>
-          </a:bodyPr>
-          <a:lstStyle/>
-          <a:p>
-            <a:pPr algn="l">
-              <a:lnSpc>
-                <a:spcPct val="170000"/>
-              </a:lnSpc>
-            </a:pPr>
-            <a:r>
-              <a:rPr sz="2200" b="1" i="0">
-                <a:solidFill>
-                  <a:srgbClr val="1A1A1A"/>
-                </a:solidFill>
-                <a:latin typeface="Arial"/>
-              </a:rPr>
-              <a:t>•  KD beats SOTA on 5 sparse datasets; no LLM at inference</a:t>
-            </a:r>
-          </a:p>
-          <a:p>
-            <a:pPr algn="l">
-              <a:lnSpc>
-                <a:spcPct val="170000"/>
-              </a:lnSpc>
-            </a:pPr>
-            <a:r>
-              <a:rPr sz="2200" b="1" i="0">
-                <a:solidFill>
-                  <a:srgbClr val="1A1A1A"/>
-                </a:solidFill>
-                <a:latin typeface="Arial"/>
-              </a:rPr>
-              <a:t>•  Local open Qwen ≈ cloud DeepSeek — KD without a paid API</a:t>
-            </a:r>
-          </a:p>
-          <a:p>
-            <a:pPr algn="l">
-              <a:lnSpc>
-                <a:spcPct val="170000"/>
-              </a:lnSpc>
-            </a:pPr>
-            <a:r>
-              <a:rPr sz="2200" b="1" i="0">
-                <a:solidFill>
-                  <a:srgbClr val="1A1A1A"/>
-                </a:solidFill>
-                <a:latin typeface="Arial"/>
-              </a:rPr>
-              <a:t>•  KD helps only when silver supplies what gold lacks</a:t>
-            </a:r>
-          </a:p>
-          <a:p>
-            <a:pPr algn="l">
-              <a:lnSpc>
-                <a:spcPct val="170000"/>
-              </a:lnSpc>
-            </a:pPr>
-            <a:r>
-              <a:rPr sz="2200" b="1" i="0">
-                <a:solidFill>
-                  <a:srgbClr val="1A1A1A"/>
-                </a:solidFill>
-                <a:latin typeface="Arial"/>
-              </a:rPr>
-              <a:t>•  60x fewer parameters than brute-force LLM inference</a:t>
-            </a:r>
-          </a:p>
-        </p:txBody>
-      </p:sp>
-      <p:sp>
-        <p:nvSpPr>
-          <p:cNvPr id="5" name="Rectangle 4"/>
+          <p:cNvPr id="4" name="Rounded Rectangle 3"/>
           <p:cNvSpPr/>
           <p:nvPr/>
         </p:nvSpPr>
         <p:spPr>
           <a:xfrm>
-            <a:off x="548640" y="5486400"/>
-            <a:ext cx="11091672" cy="914400"/>
-          </a:xfrm>
-          <a:prstGeom prst="rect">
+            <a:off x="548640" y="1920240"/>
+            <a:ext cx="11091672" cy="1051560"/>
+          </a:xfrm>
+          <a:prstGeom prst="roundRect">
             <a:avLst/>
           </a:prstGeom>
           <a:solidFill>
-            <a:srgbClr val="FFF6D6"/>
+            <a:srgbClr val="DCE6F5"/>
           </a:solidFill>
           <a:ln>
             <a:noFill/>
@@ -3542,20 +3458,199 @@
       </p:sp>
       <p:sp>
         <p:nvSpPr>
-          <p:cNvPr id="6" name="Rectangle 5"/>
+          <p:cNvPr id="5" name="TextBox 4"/>
+          <p:cNvSpPr txBox="1"/>
+          <p:nvPr/>
+        </p:nvSpPr>
+        <p:spPr>
+          <a:xfrm>
+            <a:off x="548640" y="1920240"/>
+            <a:ext cx="11091672" cy="1051560"/>
+          </a:xfrm>
+          <a:prstGeom prst="rect">
+            <a:avLst/>
+          </a:prstGeom>
+          <a:noFill/>
+        </p:spPr>
+        <p:txBody>
+          <a:bodyPr wrap="square" anchor="ctr">
+            <a:spAutoFit/>
+          </a:bodyPr>
+          <a:lstStyle/>
+          <a:p>
+            <a:pPr algn="ctr">
+              <a:lnSpc>
+                <a:spcPct val="100000"/>
+              </a:lnSpc>
+            </a:pPr>
+            <a:r>
+              <a:rPr sz="2000" b="1" i="0">
+                <a:solidFill>
+                  <a:srgbClr val="2E75B6"/>
+                </a:solidFill>
+                <a:latin typeface="Arial"/>
+              </a:rPr>
+              <a:t>DeBERTa-v3-base (440M) + KD  ≈  27B LLM brute force, 60× smaller, no LLM at inference</a:t>
+            </a:r>
+          </a:p>
+        </p:txBody>
+      </p:sp>
+      <p:sp>
+        <p:nvSpPr>
+          <p:cNvPr id="6" name="TextBox 5"/>
+          <p:cNvSpPr txBox="1"/>
+          <p:nvPr/>
+        </p:nvSpPr>
+        <p:spPr>
+          <a:xfrm>
+            <a:off x="640080" y="3291840"/>
+            <a:ext cx="10972800" cy="4572000"/>
+          </a:xfrm>
+          <a:prstGeom prst="rect">
+            <a:avLst/>
+          </a:prstGeom>
+          <a:noFill/>
+        </p:spPr>
+        <p:txBody>
+          <a:bodyPr wrap="square" anchor="t">
+            <a:spAutoFit/>
+          </a:bodyPr>
+          <a:lstStyle/>
+          <a:p>
+            <a:pPr algn="l">
+              <a:lnSpc>
+                <a:spcPct val="100000"/>
+              </a:lnSpc>
+              <a:spcAft>
+                <a:spcPts val="719"/>
+              </a:spcAft>
+            </a:pPr>
+            <a:r>
+              <a:rPr sz="2000" b="1" i="0">
+                <a:solidFill>
+                  <a:srgbClr val="2E75B6"/>
+                </a:solidFill>
+                <a:latin typeface="Arial"/>
+              </a:rPr>
+              <a:t>▪  </a:t>
+            </a:r>
+            <a:r>
+              <a:rPr sz="2000" b="1" i="0">
+                <a:solidFill>
+                  <a:srgbClr val="1A1A1A"/>
+                </a:solidFill>
+                <a:latin typeface="Arial"/>
+              </a:rPr>
+              <a:t>Beats SOTA</a:t>
+            </a:r>
+            <a:r>
+              <a:rPr sz="2000" b="0" i="0">
+                <a:solidFill>
+                  <a:srgbClr val="1A1A1A"/>
+                </a:solidFill>
+                <a:latin typeface="Arial"/>
+              </a:rPr>
+              <a:t>  on 5 sparse datasets (dev)</a:t>
+            </a:r>
+          </a:p>
+          <a:p>
+            <a:pPr algn="l">
+              <a:lnSpc>
+                <a:spcPct val="100000"/>
+              </a:lnSpc>
+              <a:spcBef>
+                <a:spcPts val="0"/>
+              </a:spcBef>
+              <a:spcAft>
+                <a:spcPts val="719"/>
+              </a:spcAft>
+            </a:pPr>
+            <a:r>
+              <a:rPr sz="2000" b="1" i="0">
+                <a:solidFill>
+                  <a:srgbClr val="2E75B6"/>
+                </a:solidFill>
+                <a:latin typeface="Arial"/>
+              </a:rPr>
+              <a:t>▪  </a:t>
+            </a:r>
+            <a:r>
+              <a:rPr sz="2000" b="1" i="0">
+                <a:solidFill>
+                  <a:srgbClr val="1A1A1A"/>
+                </a:solidFill>
+                <a:latin typeface="Arial"/>
+              </a:rPr>
+              <a:t>Local ≈ cloud:</a:t>
+            </a:r>
+            <a:r>
+              <a:rPr sz="2000" b="0" i="0">
+                <a:solidFill>
+                  <a:srgbClr val="1A1A1A"/>
+                </a:solidFill>
+                <a:latin typeface="Arial"/>
+              </a:rPr>
+              <a:t>  KD without a paid API</a:t>
+            </a:r>
+          </a:p>
+          <a:p>
+            <a:pPr algn="l">
+              <a:lnSpc>
+                <a:spcPct val="100000"/>
+              </a:lnSpc>
+              <a:spcBef>
+                <a:spcPts val="0"/>
+              </a:spcBef>
+              <a:spcAft>
+                <a:spcPts val="719"/>
+              </a:spcAft>
+            </a:pPr>
+            <a:r>
+              <a:rPr sz="2000" b="1" i="0">
+                <a:solidFill>
+                  <a:srgbClr val="2E75B6"/>
+                </a:solidFill>
+                <a:latin typeface="Arial"/>
+              </a:rPr>
+              <a:t>▪  </a:t>
+            </a:r>
+            <a:r>
+              <a:rPr sz="2000" b="1" i="0">
+                <a:solidFill>
+                  <a:srgbClr val="1A1A1A"/>
+                </a:solidFill>
+                <a:latin typeface="Arial"/>
+              </a:rPr>
+              <a:t>Clear rule:</a:t>
+            </a:r>
+            <a:r>
+              <a:rPr sz="2000" b="0" i="0">
+                <a:solidFill>
+                  <a:srgbClr val="1A1A1A"/>
+                </a:solidFill>
+                <a:latin typeface="Arial"/>
+              </a:rPr>
+              <a:t>  KD helps only when silver supplies what gold lacks</a:t>
+            </a:r>
+          </a:p>
+        </p:txBody>
+      </p:sp>
+      <p:sp>
+        <p:nvSpPr>
+          <p:cNvPr id="7" name="Rectangle 6"/>
           <p:cNvSpPr/>
           <p:nvPr/>
         </p:nvSpPr>
         <p:spPr>
           <a:xfrm>
-            <a:off x="548640" y="5486400"/>
-            <a:ext cx="118872" cy="914400"/>
+            <a:off x="548640" y="5440680"/>
+            <a:ext cx="11091672" cy="960120"/>
           </a:xfrm>
           <a:prstGeom prst="rect">
             <a:avLst/>
           </a:prstGeom>
           <a:solidFill>
-            <a:srgbClr val="F0A500"/>
+            <a:srgbClr val="FFF6D6"/>
           </a:solidFill>
           <a:ln>
             <a:noFill/>
@@ -3586,13 +3681,57 @@
       </p:sp>
       <p:sp>
         <p:nvSpPr>
-          <p:cNvPr id="7" name="TextBox 6"/>
+          <p:cNvPr id="8" name="Rectangle 7"/>
+          <p:cNvSpPr/>
+          <p:nvPr/>
+        </p:nvSpPr>
+        <p:spPr>
+          <a:xfrm>
+            <a:off x="548640" y="5440680"/>
+            <a:ext cx="118872" cy="960120"/>
+          </a:xfrm>
+          <a:prstGeom prst="rect">
+            <a:avLst/>
+          </a:prstGeom>
+          <a:solidFill>
+            <a:srgbClr val="F0A500"/>
+          </a:solidFill>
+          <a:ln>
+            <a:noFill/>
+          </a:ln>
+          <a:effectLst/>
+        </p:spPr>
+        <p:style>
+          <a:lnRef idx="1">
+            <a:schemeClr val="accent1"/>
+          </a:lnRef>
+          <a:fillRef idx="3">
+            <a:schemeClr val="accent1"/>
+          </a:fillRef>
+          <a:effectRef idx="2">
+            <a:schemeClr val="accent1"/>
+          </a:effectRef>
+          <a:fontRef idx="minor">
+            <a:schemeClr val="lt1"/>
+          </a:fontRef>
+        </p:style>
+        <p:txBody>
+          <a:bodyPr rtlCol="0" anchor="ctr"/>
+          <a:lstStyle/>
+          <a:p>
+            <a:pPr algn="ctr"/>
+          </a:p>
+        </p:txBody>
+      </p:sp>
+      <p:sp>
+        <p:nvSpPr>
+          <p:cNvPr id="9" name="TextBox 8"/>
           <p:cNvSpPr txBox="1"/>
           <p:nvPr/>
         </p:nvSpPr>
         <p:spPr>
           <a:xfrm>
-            <a:off x="868680" y="5596128"/>
+            <a:off x="868680" y="5559552"/>
             <a:ext cx="10607040" cy="320040"/>
           </a:xfrm>
           <a:prstGeom prst="rect">
@@ -3618,20 +3757,20 @@
                 </a:solidFill>
                 <a:latin typeface="Arial"/>
               </a:rPr>
-              <a:t>Takeaway</a:t>
-            </a:r>
-          </a:p>
-        </p:txBody>
-      </p:sp>
-      <p:sp>
-        <p:nvSpPr>
-          <p:cNvPr id="8" name="TextBox 7"/>
+              <a:t>Conclusion</a:t>
+            </a:r>
+          </a:p>
+        </p:txBody>
+      </p:sp>
+      <p:sp>
+        <p:nvSpPr>
+          <p:cNvPr id="10" name="TextBox 9"/>
           <p:cNvSpPr txBox="1"/>
           <p:nvPr/>
         </p:nvSpPr>
         <p:spPr>
           <a:xfrm>
-            <a:off x="868680" y="5907024"/>
+            <a:off x="868680" y="5879592"/>
             <a:ext cx="10607040" cy="457200"/>
           </a:xfrm>
           <a:prstGeom prst="rect">
@@ -3657,14 +3796,14 @@
                 </a:solidFill>
                 <a:latin typeface="Arial"/>
               </a:rPr>
-              <a:t>A low-cost, LLM-free-at-inference recipe for aspect sentiment on small, sparse datasets.</a:t>
-            </a:r>
-          </a:p>
-        </p:txBody>
-      </p:sp>
-      <p:sp>
-        <p:nvSpPr>
-          <p:cNvPr id="9" name="TextBox 8"/>
+              <a:t>A low-cost, LLM-free-at-inference recipe for aspect sentiment on small, sparse data.</a:t>
+            </a:r>
+          </a:p>
+        </p:txBody>
+      </p:sp>
+      <p:sp>
+        <p:nvSpPr>
+          <p:cNvPr id="11" name="TextBox 10"/>
           <p:cNvSpPr txBox="1"/>
           <p:nvPr/>
         </p:nvSpPr>
@@ -3767,7 +3906,7 @@
         <p:spPr>
           <a:xfrm>
             <a:off x="548640" y="777240"/>
-            <a:ext cx="11064240" cy="1005840"/>
+            <a:ext cx="11064240" cy="960120"/>
           </a:xfrm>
           <a:prstGeom prst="rect">
             <a:avLst/>
@@ -3786,33 +3925,164 @@
               </a:lnSpc>
             </a:pPr>
             <a:r>
-              <a:rPr sz="3300" b="1" i="0">
+              <a:rPr sz="3200" b="1" i="0">
                 <a:solidFill>
                   <a:srgbClr val="1A1A1A"/>
                 </a:solidFill>
                 <a:latin typeface="Arial"/>
               </a:rPr>
-              <a:t>Why this task is hard: sparse classes, tiny data</a:t>
-            </a:r>
-          </a:p>
-        </p:txBody>
-      </p:sp>
-      <p:sp>
-        <p:nvSpPr>
-          <p:cNvPr id="4" name="Rounded Rectangle 3"/>
+              <a:t>The bottleneck is class sparsity, not capacity</a:t>
+            </a:r>
+          </a:p>
+        </p:txBody>
+      </p:sp>
+      <p:sp>
+        <p:nvSpPr>
+          <p:cNvPr id="4" name="TextBox 3"/>
+          <p:cNvSpPr txBox="1"/>
+          <p:nvPr/>
+        </p:nvSpPr>
+        <p:spPr>
+          <a:xfrm>
+            <a:off x="640080" y="2011680"/>
+            <a:ext cx="10972800" cy="4572000"/>
+          </a:xfrm>
+          <a:prstGeom prst="rect">
+            <a:avLst/>
+          </a:prstGeom>
+          <a:noFill/>
+        </p:spPr>
+        <p:txBody>
+          <a:bodyPr wrap="square" anchor="t">
+            <a:spAutoFit/>
+          </a:bodyPr>
+          <a:lstStyle/>
+          <a:p>
+            <a:pPr algn="l">
+              <a:lnSpc>
+                <a:spcPct val="100000"/>
+              </a:lnSpc>
+              <a:spcAft>
+                <a:spcPts val="810"/>
+              </a:spcAft>
+            </a:pPr>
+            <a:r>
+              <a:rPr sz="2000" b="1" i="0">
+                <a:solidFill>
+                  <a:srgbClr val="2E75B6"/>
+                </a:solidFill>
+                <a:latin typeface="Arial"/>
+              </a:rPr>
+              <a:t>▪  </a:t>
+            </a:r>
+            <a:r>
+              <a:rPr sz="2000" b="1" i="0">
+                <a:solidFill>
+                  <a:srgbClr val="1A1A1A"/>
+                </a:solidFill>
+                <a:latin typeface="Arial"/>
+              </a:rPr>
+              <a:t>Hardest subset eng_laptop:</a:t>
+            </a:r>
+            <a:r>
+              <a:rPr sz="2000" b="0" i="0">
+                <a:solidFill>
+                  <a:srgbClr val="1A1A1A"/>
+                </a:solidFill>
+                <a:latin typeface="Arial"/>
+              </a:rPr>
+              <a:t>  240 (entity#attribute) classes, only 4,076 gold samples</a:t>
+            </a:r>
+          </a:p>
+          <a:p>
+            <a:pPr algn="l">
+              <a:lnSpc>
+                <a:spcPct val="100000"/>
+              </a:lnSpc>
+              <a:spcBef>
+                <a:spcPts val="0"/>
+              </a:spcBef>
+              <a:spcAft>
+                <a:spcPts val="810"/>
+              </a:spcAft>
+            </a:pPr>
+            <a:r>
+              <a:rPr sz="1800" b="0" i="0">
+                <a:solidFill>
+                  <a:srgbClr val="6B7280"/>
+                </a:solidFill>
+                <a:latin typeface="Arial"/>
+              </a:rPr>
+              <a:t>        –  </a:t>
+            </a:r>
+            <a:r>
+              <a:rPr sz="1800" b="0" i="0">
+                <a:solidFill>
+                  <a:srgbClr val="1A1A1A"/>
+                </a:solidFill>
+                <a:latin typeface="Arial"/>
+              </a:rPr>
+              <a:t>≈ 17 examples per class — long-tail classes barely seen</a:t>
+            </a:r>
+          </a:p>
+          <a:p>
+            <a:pPr algn="l">
+              <a:lnSpc>
+                <a:spcPct val="100000"/>
+              </a:lnSpc>
+              <a:spcBef>
+                <a:spcPts val="0"/>
+              </a:spcBef>
+              <a:spcAft>
+                <a:spcPts val="810"/>
+              </a:spcAft>
+            </a:pPr>
+            <a:r>
+              <a:rPr sz="2000" b="1" i="0">
+                <a:solidFill>
+                  <a:srgbClr val="2E75B6"/>
+                </a:solidFill>
+                <a:latin typeface="Arial"/>
+              </a:rPr>
+              <a:t>▪  </a:t>
+            </a:r>
+            <a:r>
+              <a:rPr sz="2000" b="1" i="0">
+                <a:solidFill>
+                  <a:srgbClr val="1A1A1A"/>
+                </a:solidFill>
+                <a:latin typeface="Arial"/>
+              </a:rPr>
+              <a:t>Small model underfits rare classes</a:t>
+            </a:r>
+            <a:r>
+              <a:rPr sz="2000" b="0" i="0">
+                <a:solidFill>
+                  <a:srgbClr val="1A1A1A"/>
+                </a:solidFill>
+                <a:latin typeface="Arial"/>
+              </a:rPr>
+              <a:t>  → best no-KD baseline only 0.3254 dev cF1</a:t>
+            </a:r>
+          </a:p>
+        </p:txBody>
+      </p:sp>
+      <p:sp>
+        <p:nvSpPr>
+          <p:cNvPr id="5" name="Rectangle 4"/>
           <p:cNvSpPr/>
           <p:nvPr/>
         </p:nvSpPr>
         <p:spPr>
           <a:xfrm>
-            <a:off x="548640" y="1920240"/>
-            <a:ext cx="3520440" cy="2651760"/>
-          </a:xfrm>
-          <a:prstGeom prst="roundRect">
+            <a:off x="548640" y="5440680"/>
+            <a:ext cx="11091672" cy="960120"/>
+          </a:xfrm>
+          <a:prstGeom prst="rect">
             <a:avLst/>
           </a:prstGeom>
           <a:solidFill>
-            <a:srgbClr val="DCE6F5"/>
+            <a:srgbClr val="FFF6D6"/>
           </a:solidFill>
           <a:ln>
             <a:noFill/>
@@ -3843,137 +4113,20 @@
       </p:sp>
       <p:sp>
         <p:nvSpPr>
-          <p:cNvPr id="5" name="TextBox 4"/>
-          <p:cNvSpPr txBox="1"/>
+          <p:cNvPr id="6" name="Rectangle 5"/>
+          <p:cNvSpPr/>
           <p:nvPr/>
         </p:nvSpPr>
         <p:spPr>
           <a:xfrm>
-            <a:off x="548640" y="2397556"/>
-            <a:ext cx="3520440" cy="1113739"/>
+            <a:off x="548640" y="5440680"/>
+            <a:ext cx="118872" cy="960120"/>
           </a:xfrm>
           <a:prstGeom prst="rect">
             <a:avLst/>
           </a:prstGeom>
-          <a:noFill/>
-        </p:spPr>
-        <p:txBody>
-          <a:bodyPr wrap="square" anchor="ctr">
-            <a:spAutoFit/>
-          </a:bodyPr>
-          <a:lstStyle/>
-          <a:p>
-            <a:pPr algn="ctr">
-              <a:lnSpc>
-                <a:spcPct val="100000"/>
-              </a:lnSpc>
-            </a:pPr>
-            <a:r>
-              <a:rPr sz="4600" b="1" i="0">
-                <a:solidFill>
-                  <a:srgbClr val="2E75B6"/>
-                </a:solidFill>
-                <a:latin typeface="Arial"/>
-              </a:rPr>
-              <a:t>4,076</a:t>
-            </a:r>
-          </a:p>
-        </p:txBody>
-      </p:sp>
-      <p:sp>
-        <p:nvSpPr>
-          <p:cNvPr id="6" name="TextBox 5"/>
-          <p:cNvSpPr txBox="1"/>
-          <p:nvPr/>
-        </p:nvSpPr>
-        <p:spPr>
-          <a:xfrm>
-            <a:off x="548640" y="3378708"/>
-            <a:ext cx="3520440" cy="583387"/>
-          </a:xfrm>
-          <a:prstGeom prst="rect">
-            <a:avLst/>
-          </a:prstGeom>
-          <a:noFill/>
-        </p:spPr>
-        <p:txBody>
-          <a:bodyPr wrap="square" anchor="t">
-            <a:spAutoFit/>
-          </a:bodyPr>
-          <a:lstStyle/>
-          <a:p>
-            <a:pPr algn="ctr">
-              <a:lnSpc>
-                <a:spcPct val="100000"/>
-              </a:lnSpc>
-            </a:pPr>
-            <a:r>
-              <a:rPr sz="1700" b="1" i="0">
-                <a:solidFill>
-                  <a:srgbClr val="1A1A1A"/>
-                </a:solidFill>
-                <a:latin typeface="Arial"/>
-              </a:rPr>
-              <a:t>gold samples</a:t>
-            </a:r>
-          </a:p>
-        </p:txBody>
-      </p:sp>
-      <p:sp>
-        <p:nvSpPr>
-          <p:cNvPr id="7" name="TextBox 6"/>
-          <p:cNvSpPr txBox="1"/>
-          <p:nvPr/>
-        </p:nvSpPr>
-        <p:spPr>
-          <a:xfrm>
-            <a:off x="548640" y="3935577"/>
-            <a:ext cx="3520440" cy="530352"/>
-          </a:xfrm>
-          <a:prstGeom prst="rect">
-            <a:avLst/>
-          </a:prstGeom>
-          <a:noFill/>
-        </p:spPr>
-        <p:txBody>
-          <a:bodyPr wrap="square" anchor="t">
-            <a:spAutoFit/>
-          </a:bodyPr>
-          <a:lstStyle/>
-          <a:p>
-            <a:pPr algn="ctr">
-              <a:lnSpc>
-                <a:spcPct val="100000"/>
-              </a:lnSpc>
-            </a:pPr>
-            <a:r>
-              <a:rPr sz="1250" b="0" i="1">
-                <a:solidFill>
-                  <a:srgbClr val="6B7280"/>
-                </a:solidFill>
-                <a:latin typeface="Arial"/>
-              </a:rPr>
-              <a:t>fewest of all subsets</a:t>
-            </a:r>
-          </a:p>
-        </p:txBody>
-      </p:sp>
-      <p:sp>
-        <p:nvSpPr>
-          <p:cNvPr id="8" name="Rounded Rectangle 7"/>
-          <p:cNvSpPr/>
-          <p:nvPr/>
-        </p:nvSpPr>
-        <p:spPr>
-          <a:xfrm>
-            <a:off x="4334256" y="1920240"/>
-            <a:ext cx="3520440" cy="2651760"/>
-          </a:xfrm>
-          <a:prstGeom prst="roundRect">
-            <a:avLst/>
-          </a:prstGeom>
           <a:solidFill>
-            <a:srgbClr val="E7DEF5"/>
+            <a:srgbClr val="F0A500"/>
           </a:solidFill>
           <a:ln>
             <a:noFill/>
@@ -4004,14 +4157,14 @@
       </p:sp>
       <p:sp>
         <p:nvSpPr>
-          <p:cNvPr id="9" name="TextBox 8"/>
+          <p:cNvPr id="7" name="TextBox 6"/>
           <p:cNvSpPr txBox="1"/>
           <p:nvPr/>
         </p:nvSpPr>
         <p:spPr>
           <a:xfrm>
-            <a:off x="4334256" y="2397556"/>
-            <a:ext cx="3520440" cy="1113739"/>
+            <a:off x="868680" y="5559552"/>
+            <a:ext cx="10607040" cy="320040"/>
           </a:xfrm>
           <a:prstGeom prst="rect">
             <a:avLst/>
@@ -4019,38 +4172,38 @@
           <a:noFill/>
         </p:spPr>
         <p:txBody>
-          <a:bodyPr wrap="square" anchor="ctr">
+          <a:bodyPr wrap="square" anchor="t">
             <a:spAutoFit/>
           </a:bodyPr>
           <a:lstStyle/>
           <a:p>
-            <a:pPr algn="ctr">
+            <a:pPr algn="l">
               <a:lnSpc>
                 <a:spcPct val="100000"/>
               </a:lnSpc>
             </a:pPr>
             <a:r>
-              <a:rPr sz="4600" b="1" i="0">
-                <a:solidFill>
-                  <a:srgbClr val="6B3FC4"/>
-                </a:solidFill>
-                <a:latin typeface="Arial"/>
-              </a:rPr>
-              <a:t>240</a:t>
-            </a:r>
-          </a:p>
-        </p:txBody>
-      </p:sp>
-      <p:sp>
-        <p:nvSpPr>
-          <p:cNvPr id="10" name="TextBox 9"/>
+              <a:rPr sz="1500" b="1" i="0">
+                <a:solidFill>
+                  <a:srgbClr val="E08600"/>
+                </a:solidFill>
+                <a:latin typeface="Arial"/>
+              </a:rPr>
+              <a:t>Conclusion</a:t>
+            </a:r>
+          </a:p>
+        </p:txBody>
+      </p:sp>
+      <p:sp>
+        <p:nvSpPr>
+          <p:cNvPr id="8" name="TextBox 7"/>
           <p:cNvSpPr txBox="1"/>
           <p:nvPr/>
         </p:nvSpPr>
         <p:spPr>
           <a:xfrm>
-            <a:off x="4334256" y="3378708"/>
-            <a:ext cx="3520440" cy="583387"/>
+            <a:off x="868680" y="5879592"/>
+            <a:ext cx="10607040" cy="457200"/>
           </a:xfrm>
           <a:prstGeom prst="rect">
             <a:avLst/>
@@ -4063,392 +4216,26 @@
           </a:bodyPr>
           <a:lstStyle/>
           <a:p>
-            <a:pPr algn="ctr">
+            <a:pPr algn="l">
               <a:lnSpc>
                 <a:spcPct val="100000"/>
               </a:lnSpc>
             </a:pPr>
             <a:r>
-              <a:rPr sz="1700" b="1" i="0">
+              <a:rPr sz="1800" b="1" i="0">
                 <a:solidFill>
                   <a:srgbClr val="1A1A1A"/>
                 </a:solidFill>
                 <a:latin typeface="Arial"/>
               </a:rPr>
-              <a:t>(entity, attribute) classes</a:t>
-            </a:r>
-          </a:p>
-        </p:txBody>
-      </p:sp>
-      <p:sp>
-        <p:nvSpPr>
-          <p:cNvPr id="11" name="TextBox 10"/>
-          <p:cNvSpPr txBox="1"/>
-          <p:nvPr/>
-        </p:nvSpPr>
-        <p:spPr>
-          <a:xfrm>
-            <a:off x="4334256" y="3935577"/>
-            <a:ext cx="3520440" cy="530352"/>
-          </a:xfrm>
-          <a:prstGeom prst="rect">
-            <a:avLst/>
-          </a:prstGeom>
-          <a:noFill/>
-        </p:spPr>
-        <p:txBody>
-          <a:bodyPr wrap="square" anchor="t">
-            <a:spAutoFit/>
-          </a:bodyPr>
-          <a:lstStyle/>
-          <a:p>
-            <a:pPr algn="ctr">
-              <a:lnSpc>
-                <a:spcPct val="100000"/>
-              </a:lnSpc>
-            </a:pPr>
-            <a:r>
-              <a:rPr sz="1250" b="0" i="1">
-                <a:solidFill>
-                  <a:srgbClr val="6B7280"/>
-                </a:solidFill>
-                <a:latin typeface="Arial"/>
-              </a:rPr>
-              <a:t>~17 samples per class</a:t>
-            </a:r>
-          </a:p>
-        </p:txBody>
-      </p:sp>
-      <p:sp>
-        <p:nvSpPr>
-          <p:cNvPr id="12" name="Rounded Rectangle 11"/>
-          <p:cNvSpPr/>
-          <p:nvPr/>
-        </p:nvSpPr>
-        <p:spPr>
-          <a:xfrm>
-            <a:off x="8119872" y="1920240"/>
-            <a:ext cx="3520440" cy="2651760"/>
-          </a:xfrm>
-          <a:prstGeom prst="roundRect">
-            <a:avLst/>
-          </a:prstGeom>
-          <a:solidFill>
-            <a:srgbClr val="E9EDF2"/>
-          </a:solidFill>
-          <a:ln>
-            <a:noFill/>
-          </a:ln>
-          <a:effectLst/>
-        </p:spPr>
-        <p:style>
-          <a:lnRef idx="1">
-            <a:schemeClr val="accent1"/>
-          </a:lnRef>
-          <a:fillRef idx="3">
-            <a:schemeClr val="accent1"/>
-          </a:fillRef>
-          <a:effectRef idx="2">
-            <a:schemeClr val="accent1"/>
-          </a:effectRef>
-          <a:fontRef idx="minor">
-            <a:schemeClr val="lt1"/>
-          </a:fontRef>
-        </p:style>
-        <p:txBody>
-          <a:bodyPr rtlCol="0" anchor="ctr"/>
-          <a:lstStyle/>
-          <a:p>
-            <a:pPr algn="ctr"/>
-          </a:p>
-        </p:txBody>
-      </p:sp>
-      <p:sp>
-        <p:nvSpPr>
-          <p:cNvPr id="13" name="TextBox 12"/>
-          <p:cNvSpPr txBox="1"/>
-          <p:nvPr/>
-        </p:nvSpPr>
-        <p:spPr>
-          <a:xfrm>
-            <a:off x="8119872" y="2397556"/>
-            <a:ext cx="3520440" cy="1113739"/>
-          </a:xfrm>
-          <a:prstGeom prst="rect">
-            <a:avLst/>
-          </a:prstGeom>
-          <a:noFill/>
-        </p:spPr>
-        <p:txBody>
-          <a:bodyPr wrap="square" anchor="ctr">
-            <a:spAutoFit/>
-          </a:bodyPr>
-          <a:lstStyle/>
-          <a:p>
-            <a:pPr algn="ctr">
-              <a:lnSpc>
-                <a:spcPct val="100000"/>
-              </a:lnSpc>
-            </a:pPr>
-            <a:r>
-              <a:rPr sz="4600" b="1" i="0">
-                <a:solidFill>
-                  <a:srgbClr val="1A1A1A"/>
-                </a:solidFill>
-                <a:latin typeface="Arial"/>
-              </a:rPr>
-              <a:t>0.3254</a:t>
-            </a:r>
-          </a:p>
-        </p:txBody>
-      </p:sp>
-      <p:sp>
-        <p:nvSpPr>
-          <p:cNvPr id="14" name="TextBox 13"/>
-          <p:cNvSpPr txBox="1"/>
-          <p:nvPr/>
-        </p:nvSpPr>
-        <p:spPr>
-          <a:xfrm>
-            <a:off x="8119872" y="3378708"/>
-            <a:ext cx="3520440" cy="583387"/>
-          </a:xfrm>
-          <a:prstGeom prst="rect">
-            <a:avLst/>
-          </a:prstGeom>
-          <a:noFill/>
-        </p:spPr>
-        <p:txBody>
-          <a:bodyPr wrap="square" anchor="t">
-            <a:spAutoFit/>
-          </a:bodyPr>
-          <a:lstStyle/>
-          <a:p>
-            <a:pPr algn="ctr">
-              <a:lnSpc>
-                <a:spcPct val="100000"/>
-              </a:lnSpc>
-            </a:pPr>
-            <a:r>
-              <a:rPr sz="1700" b="1" i="0">
-                <a:solidFill>
-                  <a:srgbClr val="1A1A1A"/>
-                </a:solidFill>
-                <a:latin typeface="Arial"/>
-              </a:rPr>
-              <a:t>best baseline (no KD)</a:t>
-            </a:r>
-          </a:p>
-        </p:txBody>
-      </p:sp>
-      <p:sp>
-        <p:nvSpPr>
-          <p:cNvPr id="15" name="TextBox 14"/>
-          <p:cNvSpPr txBox="1"/>
-          <p:nvPr/>
-        </p:nvSpPr>
-        <p:spPr>
-          <a:xfrm>
-            <a:off x="8119872" y="3935577"/>
-            <a:ext cx="3520440" cy="530352"/>
-          </a:xfrm>
-          <a:prstGeom prst="rect">
-            <a:avLst/>
-          </a:prstGeom>
-          <a:noFill/>
-        </p:spPr>
-        <p:txBody>
-          <a:bodyPr wrap="square" anchor="t">
-            <a:spAutoFit/>
-          </a:bodyPr>
-          <a:lstStyle/>
-          <a:p>
-            <a:pPr algn="ctr">
-              <a:lnSpc>
-                <a:spcPct val="100000"/>
-              </a:lnSpc>
-            </a:pPr>
-            <a:r>
-              <a:rPr sz="1250" b="0" i="1">
-                <a:solidFill>
-                  <a:srgbClr val="6B7280"/>
-                </a:solidFill>
-                <a:latin typeface="Arial"/>
-              </a:rPr>
-              <a:t>eng_laptop dev cF1</a:t>
-            </a:r>
-          </a:p>
-        </p:txBody>
-      </p:sp>
-      <p:sp>
-        <p:nvSpPr>
-          <p:cNvPr id="16" name="Rectangle 15"/>
-          <p:cNvSpPr/>
-          <p:nvPr/>
-        </p:nvSpPr>
-        <p:spPr>
-          <a:xfrm>
-            <a:off x="548640" y="5486400"/>
-            <a:ext cx="11091672" cy="914400"/>
-          </a:xfrm>
-          <a:prstGeom prst="rect">
-            <a:avLst/>
-          </a:prstGeom>
-          <a:solidFill>
-            <a:srgbClr val="FFF6D6"/>
-          </a:solidFill>
-          <a:ln>
-            <a:noFill/>
-          </a:ln>
-          <a:effectLst/>
-        </p:spPr>
-        <p:style>
-          <a:lnRef idx="1">
-            <a:schemeClr val="accent1"/>
-          </a:lnRef>
-          <a:fillRef idx="3">
-            <a:schemeClr val="accent1"/>
-          </a:fillRef>
-          <a:effectRef idx="2">
-            <a:schemeClr val="accent1"/>
-          </a:effectRef>
-          <a:fontRef idx="minor">
-            <a:schemeClr val="lt1"/>
-          </a:fontRef>
-        </p:style>
-        <p:txBody>
-          <a:bodyPr rtlCol="0" anchor="ctr"/>
-          <a:lstStyle/>
-          <a:p>
-            <a:pPr algn="ctr"/>
-          </a:p>
-        </p:txBody>
-      </p:sp>
-      <p:sp>
-        <p:nvSpPr>
-          <p:cNvPr id="17" name="Rectangle 16"/>
-          <p:cNvSpPr/>
-          <p:nvPr/>
-        </p:nvSpPr>
-        <p:spPr>
-          <a:xfrm>
-            <a:off x="548640" y="5486400"/>
-            <a:ext cx="118872" cy="914400"/>
-          </a:xfrm>
-          <a:prstGeom prst="rect">
-            <a:avLst/>
-          </a:prstGeom>
-          <a:solidFill>
-            <a:srgbClr val="F0A500"/>
-          </a:solidFill>
-          <a:ln>
-            <a:noFill/>
-          </a:ln>
-          <a:effectLst/>
-        </p:spPr>
-        <p:style>
-          <a:lnRef idx="1">
-            <a:schemeClr val="accent1"/>
-          </a:lnRef>
-          <a:fillRef idx="3">
-            <a:schemeClr val="accent1"/>
-          </a:fillRef>
-          <a:effectRef idx="2">
-            <a:schemeClr val="accent1"/>
-          </a:effectRef>
-          <a:fontRef idx="minor">
-            <a:schemeClr val="lt1"/>
-          </a:fontRef>
-        </p:style>
-        <p:txBody>
-          <a:bodyPr rtlCol="0" anchor="ctr"/>
-          <a:lstStyle/>
-          <a:p>
-            <a:pPr algn="ctr"/>
-          </a:p>
-        </p:txBody>
-      </p:sp>
-      <p:sp>
-        <p:nvSpPr>
-          <p:cNvPr id="18" name="TextBox 17"/>
-          <p:cNvSpPr txBox="1"/>
-          <p:nvPr/>
-        </p:nvSpPr>
-        <p:spPr>
-          <a:xfrm>
-            <a:off x="868680" y="5596128"/>
-            <a:ext cx="10607040" cy="320040"/>
-          </a:xfrm>
-          <a:prstGeom prst="rect">
-            <a:avLst/>
-          </a:prstGeom>
-          <a:noFill/>
-        </p:spPr>
-        <p:txBody>
-          <a:bodyPr wrap="square" anchor="t">
-            <a:spAutoFit/>
-          </a:bodyPr>
-          <a:lstStyle/>
-          <a:p>
-            <a:pPr algn="l">
-              <a:lnSpc>
-                <a:spcPct val="100000"/>
-              </a:lnSpc>
-            </a:pPr>
-            <a:r>
-              <a:rPr sz="1500" b="1" i="0">
-                <a:solidFill>
-                  <a:srgbClr val="E08600"/>
-                </a:solidFill>
-                <a:latin typeface="Arial"/>
-              </a:rPr>
-              <a:t>Takeaway</a:t>
-            </a:r>
-          </a:p>
-        </p:txBody>
-      </p:sp>
-      <p:sp>
-        <p:nvSpPr>
-          <p:cNvPr id="19" name="TextBox 18"/>
-          <p:cNvSpPr txBox="1"/>
-          <p:nvPr/>
-        </p:nvSpPr>
-        <p:spPr>
-          <a:xfrm>
-            <a:off x="868680" y="5907024"/>
-            <a:ext cx="10607040" cy="457200"/>
-          </a:xfrm>
-          <a:prstGeom prst="rect">
-            <a:avLst/>
-          </a:prstGeom>
-          <a:noFill/>
-        </p:spPr>
-        <p:txBody>
-          <a:bodyPr wrap="square" anchor="t">
-            <a:spAutoFit/>
-          </a:bodyPr>
-          <a:lstStyle/>
-          <a:p>
-            <a:pPr algn="l">
-              <a:lnSpc>
-                <a:spcPct val="100000"/>
-              </a:lnSpc>
-            </a:pPr>
-            <a:r>
-              <a:rPr sz="1800" b="1" i="0">
-                <a:solidFill>
-                  <a:srgbClr val="1A1A1A"/>
-                </a:solidFill>
-                <a:latin typeface="Arial"/>
-              </a:rPr>
-              <a:t>Small model cannot learn rare classes from gold alone — the bottleneck is class sparsity.</a:t>
-            </a:r>
-          </a:p>
-        </p:txBody>
-      </p:sp>
-      <p:sp>
-        <p:nvSpPr>
-          <p:cNvPr id="20" name="TextBox 19"/>
+              <a:t>Sparsity, not model capacity, is the limit — we must inject class priors.</a:t>
+            </a:r>
+          </a:p>
+        </p:txBody>
+      </p:sp>
+      <p:sp>
+        <p:nvSpPr>
+          <p:cNvPr id="9" name="TextBox 8"/>
           <p:cNvSpPr txBox="1"/>
           <p:nvPr/>
         </p:nvSpPr>
@@ -4551,7 +4338,7 @@
         <p:spPr>
           <a:xfrm>
             <a:off x="548640" y="777240"/>
-            <a:ext cx="11064240" cy="1005840"/>
+            <a:ext cx="11064240" cy="960120"/>
           </a:xfrm>
           <a:prstGeom prst="rect">
             <a:avLst/>
@@ -4570,7 +4357,7 @@
               </a:lnSpc>
             </a:pPr>
             <a:r>
-              <a:rPr sz="3300" b="1" i="0">
+              <a:rPr sz="3200" b="1" i="0">
                 <a:solidFill>
                   <a:srgbClr val="1A1A1A"/>
                 </a:solidFill>
@@ -4583,20 +4370,200 @@
       </p:sp>
       <p:sp>
         <p:nvSpPr>
-          <p:cNvPr id="4" name="Rounded Rectangle 3"/>
+          <p:cNvPr id="4" name="TextBox 3"/>
+          <p:cNvSpPr txBox="1"/>
+          <p:nvPr/>
+        </p:nvSpPr>
+        <p:spPr>
+          <a:xfrm>
+            <a:off x="640080" y="2011680"/>
+            <a:ext cx="10972800" cy="4572000"/>
+          </a:xfrm>
+          <a:prstGeom prst="rect">
+            <a:avLst/>
+          </a:prstGeom>
+          <a:noFill/>
+        </p:spPr>
+        <p:txBody>
+          <a:bodyPr wrap="square" anchor="t">
+            <a:spAutoFit/>
+          </a:bodyPr>
+          <a:lstStyle/>
+          <a:p>
+            <a:pPr algn="l">
+              <a:lnSpc>
+                <a:spcPct val="100000"/>
+              </a:lnSpc>
+              <a:spcAft>
+                <a:spcPts val="810"/>
+              </a:spcAft>
+            </a:pPr>
+            <a:r>
+              <a:rPr sz="2000" b="1" i="0">
+                <a:solidFill>
+                  <a:srgbClr val="2E75B6"/>
+                </a:solidFill>
+                <a:latin typeface="Arial"/>
+              </a:rPr>
+              <a:t>▪  </a:t>
+            </a:r>
+            <a:r>
+              <a:rPr sz="2000" b="1" i="0">
+                <a:solidFill>
+                  <a:srgbClr val="1A1A1A"/>
+                </a:solidFill>
+                <a:latin typeface="Arial"/>
+              </a:rPr>
+              <a:t>LLM at inference failed:</a:t>
+            </a:r>
+            <a:r>
+              <a:rPr sz="2000" b="0" i="0">
+                <a:solidFill>
+                  <a:srgbClr val="1A1A1A"/>
+                </a:solidFill>
+                <a:latin typeface="Arial"/>
+              </a:rPr>
+              <a:t>  fusion / post-correction both hurt (noisy, slow, costly)</a:t>
+            </a:r>
+          </a:p>
+          <a:p>
+            <a:pPr algn="l">
+              <a:lnSpc>
+                <a:spcPct val="100000"/>
+              </a:lnSpc>
+              <a:spcBef>
+                <a:spcPts val="0"/>
+              </a:spcBef>
+              <a:spcAft>
+                <a:spcPts val="810"/>
+              </a:spcAft>
+            </a:pPr>
+            <a:r>
+              <a:rPr sz="2000" b="1" i="0">
+                <a:solidFill>
+                  <a:srgbClr val="2E75B6"/>
+                </a:solidFill>
+                <a:latin typeface="Arial"/>
+              </a:rPr>
+              <a:t>▪  </a:t>
+            </a:r>
+            <a:r>
+              <a:rPr sz="2000" b="1" i="0">
+                <a:solidFill>
+                  <a:srgbClr val="1A1A1A"/>
+                </a:solidFill>
+                <a:latin typeface="Arial"/>
+              </a:rPr>
+              <a:t>KD instead:</a:t>
+            </a:r>
+            <a:r>
+              <a:rPr sz="2000" b="0" i="0">
+                <a:solidFill>
+                  <a:srgbClr val="1A1A1A"/>
+                </a:solidFill>
+                <a:latin typeface="Arial"/>
+              </a:rPr>
+              <a:t>  LLM silver-labels in-domain unlabeled text</a:t>
+            </a:r>
+          </a:p>
+          <a:p>
+            <a:pPr algn="l">
+              <a:lnSpc>
+                <a:spcPct val="100000"/>
+              </a:lnSpc>
+              <a:spcBef>
+                <a:spcPts val="0"/>
+              </a:spcBef>
+              <a:spcAft>
+                <a:spcPts val="810"/>
+              </a:spcAft>
+            </a:pPr>
+            <a:r>
+              <a:rPr sz="2000" b="1" i="0">
+                <a:solidFill>
+                  <a:srgbClr val="2E75B6"/>
+                </a:solidFill>
+                <a:latin typeface="Arial"/>
+              </a:rPr>
+              <a:t>▪  </a:t>
+            </a:r>
+            <a:r>
+              <a:rPr sz="2000" b="1" i="0">
+                <a:solidFill>
+                  <a:srgbClr val="1A1A1A"/>
+                </a:solidFill>
+                <a:latin typeface="Arial"/>
+              </a:rPr>
+              <a:t>Small model trains on</a:t>
+            </a:r>
+            <a:r>
+              <a:rPr sz="2000" b="0" i="0">
+                <a:solidFill>
+                  <a:srgbClr val="1A1A1A"/>
+                </a:solidFill>
+                <a:latin typeface="Arial"/>
+              </a:rPr>
+              <a:t>  gold + validated silver</a:t>
+            </a:r>
+          </a:p>
+          <a:p>
+            <a:pPr algn="l">
+              <a:lnSpc>
+                <a:spcPct val="100000"/>
+              </a:lnSpc>
+              <a:spcBef>
+                <a:spcPts val="0"/>
+              </a:spcBef>
+              <a:spcAft>
+                <a:spcPts val="810"/>
+              </a:spcAft>
+            </a:pPr>
+            <a:r>
+              <a:rPr sz="2000" b="1" i="0">
+                <a:solidFill>
+                  <a:srgbClr val="2E75B6"/>
+                </a:solidFill>
+                <a:latin typeface="Arial"/>
+              </a:rPr>
+              <a:t>▪  </a:t>
+            </a:r>
+            <a:r>
+              <a:rPr sz="2000" b="1" i="0">
+                <a:solidFill>
+                  <a:srgbClr val="1A1A1A"/>
+                </a:solidFill>
+                <a:latin typeface="Arial"/>
+              </a:rPr>
+              <a:t>At inference: no LLM</a:t>
+            </a:r>
+            <a:r>
+              <a:rPr sz="2000" b="0" i="0">
+                <a:solidFill>
+                  <a:srgbClr val="1A1A1A"/>
+                </a:solidFill>
+                <a:latin typeface="Arial"/>
+              </a:rPr>
+              <a:t>  → zero extra cost / latency</a:t>
+            </a:r>
+          </a:p>
+        </p:txBody>
+      </p:sp>
+      <p:sp>
+        <p:nvSpPr>
+          <p:cNvPr id="5" name="Rectangle 4"/>
           <p:cNvSpPr/>
           <p:nvPr/>
         </p:nvSpPr>
         <p:spPr>
           <a:xfrm>
-            <a:off x="548640" y="1920240"/>
-            <a:ext cx="3520440" cy="2834640"/>
-          </a:xfrm>
-          <a:prstGeom prst="roundRect">
+            <a:off x="548640" y="5440680"/>
+            <a:ext cx="11091672" cy="960120"/>
+          </a:xfrm>
+          <a:prstGeom prst="rect">
             <a:avLst/>
           </a:prstGeom>
           <a:solidFill>
-            <a:srgbClr val="FBE3DE"/>
+            <a:srgbClr val="FFF6D6"/>
           </a:solidFill>
           <a:ln>
             <a:noFill/>
@@ -4627,137 +4594,20 @@
       </p:sp>
       <p:sp>
         <p:nvSpPr>
-          <p:cNvPr id="5" name="TextBox 4"/>
-          <p:cNvSpPr txBox="1"/>
+          <p:cNvPr id="6" name="Rectangle 5"/>
+          <p:cNvSpPr/>
           <p:nvPr/>
         </p:nvSpPr>
         <p:spPr>
           <a:xfrm>
-            <a:off x="548640" y="2430475"/>
-            <a:ext cx="3520440" cy="1190548"/>
+            <a:off x="548640" y="5440680"/>
+            <a:ext cx="118872" cy="960120"/>
           </a:xfrm>
           <a:prstGeom prst="rect">
             <a:avLst/>
           </a:prstGeom>
-          <a:noFill/>
-        </p:spPr>
-        <p:txBody>
-          <a:bodyPr wrap="square" anchor="ctr">
-            <a:spAutoFit/>
-          </a:bodyPr>
-          <a:lstStyle/>
-          <a:p>
-            <a:pPr algn="ctr">
-              <a:lnSpc>
-                <a:spcPct val="100000"/>
-              </a:lnSpc>
-            </a:pPr>
-            <a:r>
-              <a:rPr sz="4600" b="1" i="0">
-                <a:solidFill>
-                  <a:srgbClr val="C0392B"/>
-                </a:solidFill>
-                <a:latin typeface="Arial"/>
-              </a:rPr>
-              <a:t>✗</a:t>
-            </a:r>
-          </a:p>
-        </p:txBody>
-      </p:sp>
-      <p:sp>
-        <p:nvSpPr>
-          <p:cNvPr id="6" name="TextBox 5"/>
-          <p:cNvSpPr txBox="1"/>
-          <p:nvPr/>
-        </p:nvSpPr>
-        <p:spPr>
-          <a:xfrm>
-            <a:off x="548640" y="3479292"/>
-            <a:ext cx="3520440" cy="623620"/>
-          </a:xfrm>
-          <a:prstGeom prst="rect">
-            <a:avLst/>
-          </a:prstGeom>
-          <a:noFill/>
-        </p:spPr>
-        <p:txBody>
-          <a:bodyPr wrap="square" anchor="t">
-            <a:spAutoFit/>
-          </a:bodyPr>
-          <a:lstStyle/>
-          <a:p>
-            <a:pPr algn="ctr">
-              <a:lnSpc>
-                <a:spcPct val="100000"/>
-              </a:lnSpc>
-            </a:pPr>
-            <a:r>
-              <a:rPr sz="1700" b="1" i="0">
-                <a:solidFill>
-                  <a:srgbClr val="1A1A1A"/>
-                </a:solidFill>
-                <a:latin typeface="Arial"/>
-              </a:rPr>
-              <a:t>LLM at inference</a:t>
-            </a:r>
-          </a:p>
-        </p:txBody>
-      </p:sp>
-      <p:sp>
-        <p:nvSpPr>
-          <p:cNvPr id="7" name="TextBox 6"/>
-          <p:cNvSpPr txBox="1"/>
-          <p:nvPr/>
-        </p:nvSpPr>
-        <p:spPr>
-          <a:xfrm>
-            <a:off x="548640" y="4074566"/>
-            <a:ext cx="3520440" cy="566928"/>
-          </a:xfrm>
-          <a:prstGeom prst="rect">
-            <a:avLst/>
-          </a:prstGeom>
-          <a:noFill/>
-        </p:spPr>
-        <p:txBody>
-          <a:bodyPr wrap="square" anchor="t">
-            <a:spAutoFit/>
-          </a:bodyPr>
-          <a:lstStyle/>
-          <a:p>
-            <a:pPr algn="ctr">
-              <a:lnSpc>
-                <a:spcPct val="100000"/>
-              </a:lnSpc>
-            </a:pPr>
-            <a:r>
-              <a:rPr sz="1250" b="0" i="1">
-                <a:solidFill>
-                  <a:srgbClr val="6B7280"/>
-                </a:solidFill>
-                <a:latin typeface="Arial"/>
-              </a:rPr>
-              <a:t>fusion / correction failed</a:t>
-            </a:r>
-          </a:p>
-        </p:txBody>
-      </p:sp>
-      <p:sp>
-        <p:nvSpPr>
-          <p:cNvPr id="8" name="Rounded Rectangle 7"/>
-          <p:cNvSpPr/>
-          <p:nvPr/>
-        </p:nvSpPr>
-        <p:spPr>
-          <a:xfrm>
-            <a:off x="4334256" y="1920240"/>
-            <a:ext cx="3520440" cy="2834640"/>
-          </a:xfrm>
-          <a:prstGeom prst="roundRect">
-            <a:avLst/>
-          </a:prstGeom>
           <a:solidFill>
-            <a:srgbClr val="DCE6F5"/>
+            <a:srgbClr val="F0A500"/>
           </a:solidFill>
           <a:ln>
             <a:noFill/>
@@ -4788,14 +4638,14 @@
       </p:sp>
       <p:sp>
         <p:nvSpPr>
-          <p:cNvPr id="9" name="TextBox 8"/>
+          <p:cNvPr id="7" name="TextBox 6"/>
           <p:cNvSpPr txBox="1"/>
           <p:nvPr/>
         </p:nvSpPr>
         <p:spPr>
           <a:xfrm>
-            <a:off x="4334256" y="2430475"/>
-            <a:ext cx="3520440" cy="1190548"/>
+            <a:off x="868680" y="5559552"/>
+            <a:ext cx="10607040" cy="320040"/>
           </a:xfrm>
           <a:prstGeom prst="rect">
             <a:avLst/>
@@ -4803,38 +4653,38 @@
           <a:noFill/>
         </p:spPr>
         <p:txBody>
-          <a:bodyPr wrap="square" anchor="ctr">
+          <a:bodyPr wrap="square" anchor="t">
             <a:spAutoFit/>
           </a:bodyPr>
           <a:lstStyle/>
           <a:p>
-            <a:pPr algn="ctr">
+            <a:pPr algn="l">
               <a:lnSpc>
                 <a:spcPct val="100000"/>
               </a:lnSpc>
             </a:pPr>
             <a:r>
-              <a:rPr sz="4600" b="1" i="0">
-                <a:solidFill>
-                  <a:srgbClr val="2E75B6"/>
-                </a:solidFill>
-                <a:latin typeface="Arial"/>
-              </a:rPr>
-              <a:t>→</a:t>
-            </a:r>
-          </a:p>
-        </p:txBody>
-      </p:sp>
-      <p:sp>
-        <p:nvSpPr>
-          <p:cNvPr id="10" name="TextBox 9"/>
+              <a:rPr sz="1500" b="1" i="0">
+                <a:solidFill>
+                  <a:srgbClr val="E08600"/>
+                </a:solidFill>
+                <a:latin typeface="Arial"/>
+              </a:rPr>
+              <a:t>Conclusion</a:t>
+            </a:r>
+          </a:p>
+        </p:txBody>
+      </p:sp>
+      <p:sp>
+        <p:nvSpPr>
+          <p:cNvPr id="8" name="TextBox 7"/>
           <p:cNvSpPr txBox="1"/>
           <p:nvPr/>
         </p:nvSpPr>
         <p:spPr>
           <a:xfrm>
-            <a:off x="4334256" y="3479292"/>
-            <a:ext cx="3520440" cy="623620"/>
+            <a:off x="868680" y="5879592"/>
+            <a:ext cx="10607040" cy="457200"/>
           </a:xfrm>
           <a:prstGeom prst="rect">
             <a:avLst/>
@@ -4847,392 +4697,26 @@
           </a:bodyPr>
           <a:lstStyle/>
           <a:p>
-            <a:pPr algn="ctr">
+            <a:pPr algn="l">
               <a:lnSpc>
                 <a:spcPct val="100000"/>
               </a:lnSpc>
             </a:pPr>
             <a:r>
-              <a:rPr sz="1700" b="1" i="0">
+              <a:rPr sz="1800" b="1" i="0">
                 <a:solidFill>
                   <a:srgbClr val="1A1A1A"/>
                 </a:solidFill>
                 <a:latin typeface="Arial"/>
               </a:rPr>
-              <a:t>LLM labels silver</a:t>
-            </a:r>
-          </a:p>
-        </p:txBody>
-      </p:sp>
-      <p:sp>
-        <p:nvSpPr>
-          <p:cNvPr id="11" name="TextBox 10"/>
-          <p:cNvSpPr txBox="1"/>
-          <p:nvPr/>
-        </p:nvSpPr>
-        <p:spPr>
-          <a:xfrm>
-            <a:off x="4334256" y="4074566"/>
-            <a:ext cx="3520440" cy="566928"/>
-          </a:xfrm>
-          <a:prstGeom prst="rect">
-            <a:avLst/>
-          </a:prstGeom>
-          <a:noFill/>
-        </p:spPr>
-        <p:txBody>
-          <a:bodyPr wrap="square" anchor="t">
-            <a:spAutoFit/>
-          </a:bodyPr>
-          <a:lstStyle/>
-          <a:p>
-            <a:pPr algn="ctr">
-              <a:lnSpc>
-                <a:spcPct val="100000"/>
-              </a:lnSpc>
-            </a:pPr>
-            <a:r>
-              <a:rPr sz="1250" b="0" i="1">
-                <a:solidFill>
-                  <a:srgbClr val="6B7280"/>
-                </a:solidFill>
-                <a:latin typeface="Arial"/>
-              </a:rPr>
-              <a:t>small model learns priors</a:t>
-            </a:r>
-          </a:p>
-        </p:txBody>
-      </p:sp>
-      <p:sp>
-        <p:nvSpPr>
-          <p:cNvPr id="12" name="Rounded Rectangle 11"/>
-          <p:cNvSpPr/>
-          <p:nvPr/>
-        </p:nvSpPr>
-        <p:spPr>
-          <a:xfrm>
-            <a:off x="8119872" y="1920240"/>
-            <a:ext cx="3520440" cy="2834640"/>
-          </a:xfrm>
-          <a:prstGeom prst="roundRect">
-            <a:avLst/>
-          </a:prstGeom>
-          <a:solidFill>
-            <a:srgbClr val="DDF0E4"/>
-          </a:solidFill>
-          <a:ln>
-            <a:noFill/>
-          </a:ln>
-          <a:effectLst/>
-        </p:spPr>
-        <p:style>
-          <a:lnRef idx="1">
-            <a:schemeClr val="accent1"/>
-          </a:lnRef>
-          <a:fillRef idx="3">
-            <a:schemeClr val="accent1"/>
-          </a:fillRef>
-          <a:effectRef idx="2">
-            <a:schemeClr val="accent1"/>
-          </a:effectRef>
-          <a:fontRef idx="minor">
-            <a:schemeClr val="lt1"/>
-          </a:fontRef>
-        </p:style>
-        <p:txBody>
-          <a:bodyPr rtlCol="0" anchor="ctr"/>
-          <a:lstStyle/>
-          <a:p>
-            <a:pPr algn="ctr"/>
-          </a:p>
-        </p:txBody>
-      </p:sp>
-      <p:sp>
-        <p:nvSpPr>
-          <p:cNvPr id="13" name="TextBox 12"/>
-          <p:cNvSpPr txBox="1"/>
-          <p:nvPr/>
-        </p:nvSpPr>
-        <p:spPr>
-          <a:xfrm>
-            <a:off x="8119872" y="2430475"/>
-            <a:ext cx="3520440" cy="1190548"/>
-          </a:xfrm>
-          <a:prstGeom prst="rect">
-            <a:avLst/>
-          </a:prstGeom>
-          <a:noFill/>
-        </p:spPr>
-        <p:txBody>
-          <a:bodyPr wrap="square" anchor="ctr">
-            <a:spAutoFit/>
-          </a:bodyPr>
-          <a:lstStyle/>
-          <a:p>
-            <a:pPr algn="ctr">
-              <a:lnSpc>
-                <a:spcPct val="100000"/>
-              </a:lnSpc>
-            </a:pPr>
-            <a:r>
-              <a:rPr sz="4600" b="1" i="0">
-                <a:solidFill>
-                  <a:srgbClr val="2E8B57"/>
-                </a:solidFill>
-                <a:latin typeface="Arial"/>
-              </a:rPr>
-              <a:t>✓</a:t>
-            </a:r>
-          </a:p>
-        </p:txBody>
-      </p:sp>
-      <p:sp>
-        <p:nvSpPr>
-          <p:cNvPr id="14" name="TextBox 13"/>
-          <p:cNvSpPr txBox="1"/>
-          <p:nvPr/>
-        </p:nvSpPr>
-        <p:spPr>
-          <a:xfrm>
-            <a:off x="8119872" y="3479292"/>
-            <a:ext cx="3520440" cy="623620"/>
-          </a:xfrm>
-          <a:prstGeom prst="rect">
-            <a:avLst/>
-          </a:prstGeom>
-          <a:noFill/>
-        </p:spPr>
-        <p:txBody>
-          <a:bodyPr wrap="square" anchor="t">
-            <a:spAutoFit/>
-          </a:bodyPr>
-          <a:lstStyle/>
-          <a:p>
-            <a:pPr algn="ctr">
-              <a:lnSpc>
-                <a:spcPct val="100000"/>
-              </a:lnSpc>
-            </a:pPr>
-            <a:r>
-              <a:rPr sz="1700" b="1" i="0">
-                <a:solidFill>
-                  <a:srgbClr val="1A1A1A"/>
-                </a:solidFill>
-                <a:latin typeface="Arial"/>
-              </a:rPr>
-              <a:t>No LLM at inference</a:t>
-            </a:r>
-          </a:p>
-        </p:txBody>
-      </p:sp>
-      <p:sp>
-        <p:nvSpPr>
-          <p:cNvPr id="15" name="TextBox 14"/>
-          <p:cNvSpPr txBox="1"/>
-          <p:nvPr/>
-        </p:nvSpPr>
-        <p:spPr>
-          <a:xfrm>
-            <a:off x="8119872" y="4074566"/>
-            <a:ext cx="3520440" cy="566928"/>
-          </a:xfrm>
-          <a:prstGeom prst="rect">
-            <a:avLst/>
-          </a:prstGeom>
-          <a:noFill/>
-        </p:spPr>
-        <p:txBody>
-          <a:bodyPr wrap="square" anchor="t">
-            <a:spAutoFit/>
-          </a:bodyPr>
-          <a:lstStyle/>
-          <a:p>
-            <a:pPr algn="ctr">
-              <a:lnSpc>
-                <a:spcPct val="100000"/>
-              </a:lnSpc>
-            </a:pPr>
-            <a:r>
-              <a:rPr sz="1250" b="0" i="1">
-                <a:solidFill>
-                  <a:srgbClr val="6B7280"/>
-                </a:solidFill>
-                <a:latin typeface="Arial"/>
-              </a:rPr>
-              <a:t>zero extra cost</a:t>
-            </a:r>
-          </a:p>
-        </p:txBody>
-      </p:sp>
-      <p:sp>
-        <p:nvSpPr>
-          <p:cNvPr id="16" name="Rectangle 15"/>
-          <p:cNvSpPr/>
-          <p:nvPr/>
-        </p:nvSpPr>
-        <p:spPr>
-          <a:xfrm>
-            <a:off x="548640" y="5486400"/>
-            <a:ext cx="11091672" cy="914400"/>
-          </a:xfrm>
-          <a:prstGeom prst="rect">
-            <a:avLst/>
-          </a:prstGeom>
-          <a:solidFill>
-            <a:srgbClr val="FFF6D6"/>
-          </a:solidFill>
-          <a:ln>
-            <a:noFill/>
-          </a:ln>
-          <a:effectLst/>
-        </p:spPr>
-        <p:style>
-          <a:lnRef idx="1">
-            <a:schemeClr val="accent1"/>
-          </a:lnRef>
-          <a:fillRef idx="3">
-            <a:schemeClr val="accent1"/>
-          </a:fillRef>
-          <a:effectRef idx="2">
-            <a:schemeClr val="accent1"/>
-          </a:effectRef>
-          <a:fontRef idx="minor">
-            <a:schemeClr val="lt1"/>
-          </a:fontRef>
-        </p:style>
-        <p:txBody>
-          <a:bodyPr rtlCol="0" anchor="ctr"/>
-          <a:lstStyle/>
-          <a:p>
-            <a:pPr algn="ctr"/>
-          </a:p>
-        </p:txBody>
-      </p:sp>
-      <p:sp>
-        <p:nvSpPr>
-          <p:cNvPr id="17" name="Rectangle 16"/>
-          <p:cNvSpPr/>
-          <p:nvPr/>
-        </p:nvSpPr>
-        <p:spPr>
-          <a:xfrm>
-            <a:off x="548640" y="5486400"/>
-            <a:ext cx="118872" cy="914400"/>
-          </a:xfrm>
-          <a:prstGeom prst="rect">
-            <a:avLst/>
-          </a:prstGeom>
-          <a:solidFill>
-            <a:srgbClr val="F0A500"/>
-          </a:solidFill>
-          <a:ln>
-            <a:noFill/>
-          </a:ln>
-          <a:effectLst/>
-        </p:spPr>
-        <p:style>
-          <a:lnRef idx="1">
-            <a:schemeClr val="accent1"/>
-          </a:lnRef>
-          <a:fillRef idx="3">
-            <a:schemeClr val="accent1"/>
-          </a:fillRef>
-          <a:effectRef idx="2">
-            <a:schemeClr val="accent1"/>
-          </a:effectRef>
-          <a:fontRef idx="minor">
-            <a:schemeClr val="lt1"/>
-          </a:fontRef>
-        </p:style>
-        <p:txBody>
-          <a:bodyPr rtlCol="0" anchor="ctr"/>
-          <a:lstStyle/>
-          <a:p>
-            <a:pPr algn="ctr"/>
-          </a:p>
-        </p:txBody>
-      </p:sp>
-      <p:sp>
-        <p:nvSpPr>
-          <p:cNvPr id="18" name="TextBox 17"/>
-          <p:cNvSpPr txBox="1"/>
-          <p:nvPr/>
-        </p:nvSpPr>
-        <p:spPr>
-          <a:xfrm>
-            <a:off x="868680" y="5596128"/>
-            <a:ext cx="10607040" cy="320040"/>
-          </a:xfrm>
-          <a:prstGeom prst="rect">
-            <a:avLst/>
-          </a:prstGeom>
-          <a:noFill/>
-        </p:spPr>
-        <p:txBody>
-          <a:bodyPr wrap="square" anchor="t">
-            <a:spAutoFit/>
-          </a:bodyPr>
-          <a:lstStyle/>
-          <a:p>
-            <a:pPr algn="l">
-              <a:lnSpc>
-                <a:spcPct val="100000"/>
-              </a:lnSpc>
-            </a:pPr>
-            <a:r>
-              <a:rPr sz="1500" b="1" i="0">
-                <a:solidFill>
-                  <a:srgbClr val="E08600"/>
-                </a:solidFill>
-                <a:latin typeface="Arial"/>
-              </a:rPr>
-              <a:t>Takeaway</a:t>
-            </a:r>
-          </a:p>
-        </p:txBody>
-      </p:sp>
-      <p:sp>
-        <p:nvSpPr>
-          <p:cNvPr id="19" name="TextBox 18"/>
-          <p:cNvSpPr txBox="1"/>
-          <p:nvPr/>
-        </p:nvSpPr>
-        <p:spPr>
-          <a:xfrm>
-            <a:off x="868680" y="5907024"/>
-            <a:ext cx="10607040" cy="457200"/>
-          </a:xfrm>
-          <a:prstGeom prst="rect">
-            <a:avLst/>
-          </a:prstGeom>
-          <a:noFill/>
-        </p:spPr>
-        <p:txBody>
-          <a:bodyPr wrap="square" anchor="t">
-            <a:spAutoFit/>
-          </a:bodyPr>
-          <a:lstStyle/>
-          <a:p>
-            <a:pPr algn="l">
-              <a:lnSpc>
-                <a:spcPct val="100000"/>
-              </a:lnSpc>
-            </a:pPr>
-            <a:r>
-              <a:rPr sz="1800" b="1" i="0">
-                <a:solidFill>
-                  <a:srgbClr val="1A1A1A"/>
-                </a:solidFill>
-                <a:latin typeface="Arial"/>
-              </a:rPr>
-              <a:t>KD = LLM silver-labels in-domain text; the 440M model trains on gold + silver. No LLM when predicting.</a:t>
-            </a:r>
-          </a:p>
-        </p:txBody>
-      </p:sp>
-      <p:sp>
-        <p:nvSpPr>
-          <p:cNvPr id="20" name="TextBox 19"/>
+              <a:t>Put the LLM's priors into the weights, not into the inference path.</a:t>
+            </a:r>
+          </a:p>
+        </p:txBody>
+      </p:sp>
+      <p:sp>
+        <p:nvSpPr>
+          <p:cNvPr id="9" name="TextBox 8"/>
           <p:cNvSpPr txBox="1"/>
           <p:nvPr/>
         </p:nvSpPr>
@@ -5335,7 +4819,7 @@
         <p:spPr>
           <a:xfrm>
             <a:off x="548640" y="777240"/>
-            <a:ext cx="11064240" cy="1005840"/>
+            <a:ext cx="11064240" cy="960120"/>
           </a:xfrm>
           <a:prstGeom prst="rect">
             <a:avLst/>
@@ -5354,7 +4838,7 @@
               </a:lnSpc>
             </a:pPr>
             <a:r>
-              <a:rPr sz="3300" b="1" i="0">
+              <a:rPr sz="3200" b="1" i="0">
                 <a:solidFill>
                   <a:srgbClr val="1A1A1A"/>
                 </a:solidFill>
@@ -5367,58 +4851,14 @@
       </p:sp>
       <p:sp>
         <p:nvSpPr>
-          <p:cNvPr id="4" name="Rounded Rectangle 3"/>
-          <p:cNvSpPr/>
-          <p:nvPr/>
-        </p:nvSpPr>
-        <p:spPr>
-          <a:xfrm>
-            <a:off x="548640" y="1828800"/>
-            <a:ext cx="2743200" cy="2468880"/>
-          </a:xfrm>
-          <a:prstGeom prst="roundRect">
-            <a:avLst/>
-          </a:prstGeom>
-          <a:solidFill>
-            <a:srgbClr val="E7DEF5"/>
-          </a:solidFill>
-          <a:ln>
-            <a:noFill/>
-          </a:ln>
-          <a:effectLst/>
-        </p:spPr>
-        <p:style>
-          <a:lnRef idx="1">
-            <a:schemeClr val="accent1"/>
-          </a:lnRef>
-          <a:fillRef idx="3">
-            <a:schemeClr val="accent1"/>
-          </a:fillRef>
-          <a:effectRef idx="2">
-            <a:schemeClr val="accent1"/>
-          </a:effectRef>
-          <a:fontRef idx="minor">
-            <a:schemeClr val="lt1"/>
-          </a:fontRef>
-        </p:style>
-        <p:txBody>
-          <a:bodyPr rtlCol="0" anchor="ctr"/>
-          <a:lstStyle/>
-          <a:p>
-            <a:pPr algn="ctr"/>
-          </a:p>
-        </p:txBody>
-      </p:sp>
-      <p:sp>
-        <p:nvSpPr>
-          <p:cNvPr id="5" name="TextBox 4"/>
+          <p:cNvPr id="4" name="TextBox 3"/>
           <p:cNvSpPr txBox="1"/>
           <p:nvPr/>
         </p:nvSpPr>
         <p:spPr>
           <a:xfrm>
-            <a:off x="548640" y="2148840"/>
-            <a:ext cx="2743200" cy="731520"/>
+            <a:off x="640080" y="1828800"/>
+            <a:ext cx="10972800" cy="4572000"/>
           </a:xfrm>
           <a:prstGeom prst="rect">
             <a:avLst/>
@@ -5426,38 +4866,255 @@
           <a:noFill/>
         </p:spPr>
         <p:txBody>
-          <a:bodyPr wrap="square" anchor="ctr">
+          <a:bodyPr wrap="square" anchor="t">
             <a:spAutoFit/>
           </a:bodyPr>
           <a:lstStyle/>
           <a:p>
-            <a:pPr algn="ctr">
+            <a:pPr algn="l">
               <a:lnSpc>
                 <a:spcPct val="100000"/>
               </a:lnSpc>
+              <a:spcAft>
+                <a:spcPts val="513"/>
+              </a:spcAft>
             </a:pPr>
             <a:r>
               <a:rPr sz="1900" b="1" i="0">
                 <a:solidFill>
-                  <a:srgbClr val="6B3FC4"/>
-                </a:solidFill>
-                <a:latin typeface="Arial"/>
-              </a:rPr>
-              <a:t>LogSigma</a:t>
-            </a:r>
-          </a:p>
-        </p:txBody>
-      </p:sp>
-      <p:sp>
-        <p:nvSpPr>
-          <p:cNvPr id="6" name="TextBox 5"/>
+                  <a:srgbClr val="2E75B6"/>
+                </a:solidFill>
+                <a:latin typeface="Arial"/>
+              </a:rPr>
+              <a:t>▪  </a:t>
+            </a:r>
+            <a:r>
+              <a:rPr sz="1900" b="1" i="0">
+                <a:solidFill>
+                  <a:srgbClr val="1A1A1A"/>
+                </a:solidFill>
+                <a:latin typeface="Arial"/>
+              </a:rPr>
+              <a:t>LogSigma:</a:t>
+            </a:r>
+            <a:r>
+              <a:rPr sz="1900" b="0" i="0">
+                <a:solidFill>
+                  <a:srgbClr val="1A1A1A"/>
+                </a:solidFill>
+                <a:latin typeface="Arial"/>
+              </a:rPr>
+              <a:t>  uncertainty-weighted multi-task learning</a:t>
+            </a:r>
+            <a:r>
+              <a:rPr sz="1500" b="0" i="0">
+                <a:solidFill>
+                  <a:srgbClr val="2E75B6"/>
+                </a:solidFill>
+                <a:latin typeface="Arial"/>
+              </a:rPr>
+              <a:t>  [2]</a:t>
+            </a:r>
+          </a:p>
+          <a:p>
+            <a:pPr algn="l">
+              <a:lnSpc>
+                <a:spcPct val="100000"/>
+              </a:lnSpc>
+              <a:spcBef>
+                <a:spcPts val="0"/>
+              </a:spcBef>
+              <a:spcAft>
+                <a:spcPts val="513"/>
+              </a:spcAft>
+            </a:pPr>
+            <a:r>
+              <a:rPr sz="1900" b="1" i="0">
+                <a:solidFill>
+                  <a:srgbClr val="2E75B6"/>
+                </a:solidFill>
+                <a:latin typeface="Arial"/>
+              </a:rPr>
+              <a:t>▪  </a:t>
+            </a:r>
+            <a:r>
+              <a:rPr sz="1900" b="1" i="0">
+                <a:solidFill>
+                  <a:srgbClr val="1A1A1A"/>
+                </a:solidFill>
+                <a:latin typeface="Arial"/>
+              </a:rPr>
+              <a:t>nchellwig (SCSG):</a:t>
+            </a:r>
+            <a:r>
+              <a:rPr sz="1900" b="0" i="0">
+                <a:solidFill>
+                  <a:srgbClr val="1A1A1A"/>
+                </a:solidFill>
+                <a:latin typeface="Arial"/>
+              </a:rPr>
+              <a:t>  Gemma-27B, 10× self-consistency vote</a:t>
+            </a:r>
+            <a:r>
+              <a:rPr sz="1500" b="0" i="0">
+                <a:solidFill>
+                  <a:srgbClr val="2E75B6"/>
+                </a:solidFill>
+                <a:latin typeface="Arial"/>
+              </a:rPr>
+              <a:t>  [3]</a:t>
+            </a:r>
+          </a:p>
+          <a:p>
+            <a:pPr algn="l">
+              <a:lnSpc>
+                <a:spcPct val="100000"/>
+              </a:lnSpc>
+              <a:spcBef>
+                <a:spcPts val="0"/>
+              </a:spcBef>
+              <a:spcAft>
+                <a:spcPts val="513"/>
+              </a:spcAft>
+            </a:pPr>
+            <a:r>
+              <a:rPr sz="1900" b="1" i="0">
+                <a:solidFill>
+                  <a:srgbClr val="2E75B6"/>
+                </a:solidFill>
+                <a:latin typeface="Arial"/>
+              </a:rPr>
+              <a:t>▪  </a:t>
+            </a:r>
+            <a:r>
+              <a:rPr sz="1900" b="1" i="0">
+                <a:solidFill>
+                  <a:srgbClr val="1A1A1A"/>
+                </a:solidFill>
+                <a:latin typeface="Arial"/>
+              </a:rPr>
+              <a:t>Takoyaki:</a:t>
+            </a:r>
+            <a:r>
+              <a:rPr sz="1900" b="0" i="0">
+                <a:solidFill>
+                  <a:srgbClr val="1A1A1A"/>
+                </a:solidFill>
+                <a:latin typeface="Arial"/>
+              </a:rPr>
+              <a:t>  few-shot demonstration retrieval</a:t>
+            </a:r>
+            <a:r>
+              <a:rPr sz="1500" b="0" i="0">
+                <a:solidFill>
+                  <a:srgbClr val="2E75B6"/>
+                </a:solidFill>
+                <a:latin typeface="Arial"/>
+              </a:rPr>
+              <a:t>  [4]</a:t>
+            </a:r>
+          </a:p>
+          <a:p>
+            <a:pPr algn="l">
+              <a:lnSpc>
+                <a:spcPct val="100000"/>
+              </a:lnSpc>
+              <a:spcBef>
+                <a:spcPts val="0"/>
+              </a:spcBef>
+              <a:spcAft>
+                <a:spcPts val="513"/>
+              </a:spcAft>
+            </a:pPr>
+            <a:r>
+              <a:rPr sz="1900" b="1" i="0">
+                <a:solidFill>
+                  <a:srgbClr val="2E75B6"/>
+                </a:solidFill>
+                <a:latin typeface="Arial"/>
+              </a:rPr>
+              <a:t>▪  </a:t>
+            </a:r>
+            <a:r>
+              <a:rPr sz="1900" b="1" i="0">
+                <a:solidFill>
+                  <a:srgbClr val="1A1A1A"/>
+                </a:solidFill>
+                <a:latin typeface="Arial"/>
+              </a:rPr>
+              <a:t>NYCU Speech Lab:</a:t>
+            </a:r>
+            <a:r>
+              <a:rPr sz="1900" b="0" i="0">
+                <a:solidFill>
+                  <a:srgbClr val="1A1A1A"/>
+                </a:solidFill>
+                <a:latin typeface="Arial"/>
+              </a:rPr>
+              <a:t>  heterogeneous model ensemble + voting</a:t>
+            </a:r>
+            <a:r>
+              <a:rPr sz="1500" b="0" i="0">
+                <a:solidFill>
+                  <a:srgbClr val="2E75B6"/>
+                </a:solidFill>
+                <a:latin typeface="Arial"/>
+              </a:rPr>
+              <a:t>  [5]</a:t>
+            </a:r>
+          </a:p>
+          <a:p>
+            <a:pPr algn="l">
+              <a:lnSpc>
+                <a:spcPct val="100000"/>
+              </a:lnSpc>
+              <a:spcBef>
+                <a:spcPts val="0"/>
+              </a:spcBef>
+              <a:spcAft>
+                <a:spcPts val="513"/>
+              </a:spcAft>
+            </a:pPr>
+            <a:r>
+              <a:rPr sz="1900" b="1" i="0">
+                <a:solidFill>
+                  <a:srgbClr val="2E75B6"/>
+                </a:solidFill>
+                <a:latin typeface="Arial"/>
+              </a:rPr>
+              <a:t>▪  </a:t>
+            </a:r>
+            <a:r>
+              <a:rPr sz="1900" b="1" i="0">
+                <a:solidFill>
+                  <a:srgbClr val="1A1A1A"/>
+                </a:solidFill>
+                <a:latin typeface="Arial"/>
+              </a:rPr>
+              <a:t>Ours:</a:t>
+            </a:r>
+            <a:r>
+              <a:rPr sz="1900" b="0" i="0">
+                <a:solidFill>
+                  <a:srgbClr val="1A1A1A"/>
+                </a:solidFill>
+                <a:latin typeface="Arial"/>
+              </a:rPr>
+              <a:t>  distill into a 440M model — no LLM at inference</a:t>
+            </a:r>
+          </a:p>
+        </p:txBody>
+      </p:sp>
+      <p:sp>
+        <p:nvSpPr>
+          <p:cNvPr id="5" name="TextBox 4"/>
           <p:cNvSpPr txBox="1"/>
           <p:nvPr/>
         </p:nvSpPr>
         <p:spPr>
           <a:xfrm>
-            <a:off x="548640" y="2971800"/>
-            <a:ext cx="2743200" cy="1097280"/>
+            <a:off x="548640" y="5074920"/>
+            <a:ext cx="11155680" cy="274320"/>
           </a:xfrm>
           <a:prstGeom prst="rect">
             <a:avLst/>
@@ -5470,78 +5127,33 @@
           </a:bodyPr>
           <a:lstStyle/>
           <a:p>
-            <a:pPr algn="ctr">
+            <a:pPr algn="l">
               <a:lnSpc>
                 <a:spcPct val="100000"/>
               </a:lnSpc>
             </a:pPr>
             <a:r>
-              <a:rPr sz="1500" b="0" i="0">
-                <a:solidFill>
-                  <a:srgbClr val="1A1A1A"/>
-                </a:solidFill>
-                <a:latin typeface="Arial"/>
-              </a:rPr>
-              <a:t>uncertainty-weighted
-multi-task learning</a:t>
-            </a:r>
-          </a:p>
-        </p:txBody>
-      </p:sp>
-      <p:sp>
-        <p:nvSpPr>
-          <p:cNvPr id="7" name="Rounded Rectangle 6"/>
-          <p:cNvSpPr/>
-          <p:nvPr/>
-        </p:nvSpPr>
-        <p:spPr>
-          <a:xfrm>
-            <a:off x="3483864" y="1828800"/>
-            <a:ext cx="2743200" cy="2468880"/>
-          </a:xfrm>
-          <a:prstGeom prst="roundRect">
-            <a:avLst/>
-          </a:prstGeom>
-          <a:solidFill>
-            <a:srgbClr val="DCE6F5"/>
-          </a:solidFill>
-          <a:ln>
-            <a:noFill/>
-          </a:ln>
-          <a:effectLst/>
-        </p:spPr>
-        <p:style>
-          <a:lnRef idx="1">
-            <a:schemeClr val="accent1"/>
-          </a:lnRef>
-          <a:fillRef idx="3">
-            <a:schemeClr val="accent1"/>
-          </a:fillRef>
-          <a:effectRef idx="2">
-            <a:schemeClr val="accent1"/>
-          </a:effectRef>
-          <a:fontRef idx="minor">
-            <a:schemeClr val="lt1"/>
-          </a:fontRef>
-        </p:style>
-        <p:txBody>
-          <a:bodyPr rtlCol="0" anchor="ctr"/>
-          <a:lstStyle/>
-          <a:p>
-            <a:pPr algn="ctr"/>
-          </a:p>
-        </p:txBody>
-      </p:sp>
-      <p:sp>
-        <p:nvSpPr>
-          <p:cNvPr id="8" name="TextBox 7"/>
+              <a:rPr sz="1300" b="1" i="0">
+                <a:solidFill>
+                  <a:srgbClr val="6B7280"/>
+                </a:solidFill>
+                <a:latin typeface="Arial"/>
+              </a:rPr>
+              <a:t>References</a:t>
+            </a:r>
+          </a:p>
+        </p:txBody>
+      </p:sp>
+      <p:sp>
+        <p:nvSpPr>
+          <p:cNvPr id="6" name="TextBox 5"/>
           <p:cNvSpPr txBox="1"/>
           <p:nvPr/>
         </p:nvSpPr>
         <p:spPr>
           <a:xfrm>
-            <a:off x="3483864" y="2148840"/>
-            <a:ext cx="2743200" cy="731520"/>
+            <a:off x="548640" y="5349240"/>
+            <a:ext cx="11521440" cy="1371600"/>
           </a:xfrm>
           <a:prstGeom prst="rect">
             <a:avLst/>
@@ -5549,439 +5161,107 @@
           <a:noFill/>
         </p:spPr>
         <p:txBody>
-          <a:bodyPr wrap="square" anchor="ctr">
-            <a:spAutoFit/>
-          </a:bodyPr>
-          <a:lstStyle/>
-          <a:p>
-            <a:pPr algn="ctr">
-              <a:lnSpc>
-                <a:spcPct val="100000"/>
-              </a:lnSpc>
-            </a:pPr>
-            <a:r>
-              <a:rPr sz="1900" b="1" i="0">
-                <a:solidFill>
-                  <a:srgbClr val="2E75B6"/>
-                </a:solidFill>
-                <a:latin typeface="Arial"/>
-              </a:rPr>
-              <a:t>nchellwig / SCSG</a:t>
-            </a:r>
-          </a:p>
-        </p:txBody>
-      </p:sp>
-      <p:sp>
-        <p:nvSpPr>
-          <p:cNvPr id="9" name="TextBox 8"/>
-          <p:cNvSpPr txBox="1"/>
-          <p:nvPr/>
-        </p:nvSpPr>
-        <p:spPr>
-          <a:xfrm>
-            <a:off x="3483864" y="2971800"/>
-            <a:ext cx="2743200" cy="1097280"/>
-          </a:xfrm>
-          <a:prstGeom prst="rect">
-            <a:avLst/>
-          </a:prstGeom>
-          <a:noFill/>
-        </p:spPr>
-        <p:txBody>
           <a:bodyPr wrap="square" anchor="t">
             <a:spAutoFit/>
           </a:bodyPr>
           <a:lstStyle/>
           <a:p>
-            <a:pPr algn="ctr">
+            <a:pPr algn="l">
               <a:lnSpc>
                 <a:spcPct val="100000"/>
               </a:lnSpc>
             </a:pPr>
             <a:r>
-              <a:rPr sz="1500" b="0" i="0">
-                <a:solidFill>
-                  <a:srgbClr val="1A1A1A"/>
-                </a:solidFill>
-                <a:latin typeface="Arial"/>
-              </a:rPr>
-              <a:t>Gemma-27B, 10x
-self-consistency vote</a:t>
-            </a:r>
-          </a:p>
-        </p:txBody>
-      </p:sp>
-      <p:sp>
-        <p:nvSpPr>
-          <p:cNvPr id="10" name="Rounded Rectangle 9"/>
-          <p:cNvSpPr/>
-          <p:nvPr/>
-        </p:nvSpPr>
-        <p:spPr>
-          <a:xfrm>
-            <a:off x="6419088" y="1828800"/>
-            <a:ext cx="2743200" cy="2468880"/>
-          </a:xfrm>
-          <a:prstGeom prst="roundRect">
-            <a:avLst/>
-          </a:prstGeom>
-          <a:solidFill>
-            <a:srgbClr val="DDF0E4"/>
-          </a:solidFill>
-          <a:ln>
-            <a:noFill/>
-          </a:ln>
-          <a:effectLst/>
-        </p:spPr>
-        <p:style>
-          <a:lnRef idx="1">
-            <a:schemeClr val="accent1"/>
-          </a:lnRef>
-          <a:fillRef idx="3">
-            <a:schemeClr val="accent1"/>
-          </a:fillRef>
-          <a:effectRef idx="2">
-            <a:schemeClr val="accent1"/>
-          </a:effectRef>
-          <a:fontRef idx="minor">
-            <a:schemeClr val="lt1"/>
-          </a:fontRef>
-        </p:style>
-        <p:txBody>
-          <a:bodyPr rtlCol="0" anchor="ctr"/>
-          <a:lstStyle/>
-          <a:p>
-            <a:pPr algn="ctr"/>
-          </a:p>
-        </p:txBody>
-      </p:sp>
-      <p:sp>
-        <p:nvSpPr>
-          <p:cNvPr id="11" name="TextBox 10"/>
-          <p:cNvSpPr txBox="1"/>
-          <p:nvPr/>
-        </p:nvSpPr>
-        <p:spPr>
-          <a:xfrm>
-            <a:off x="6419088" y="2148840"/>
-            <a:ext cx="2743200" cy="731520"/>
-          </a:xfrm>
-          <a:prstGeom prst="rect">
-            <a:avLst/>
-          </a:prstGeom>
-          <a:noFill/>
-        </p:spPr>
-        <p:txBody>
-          <a:bodyPr wrap="square" anchor="ctr">
-            <a:spAutoFit/>
-          </a:bodyPr>
-          <a:lstStyle/>
-          <a:p>
-            <a:pPr algn="ctr">
+              <a:rPr sz="1050" b="0" i="0">
+                <a:solidFill>
+                  <a:srgbClr val="6B7280"/>
+                </a:solidFill>
+                <a:latin typeface="Arial"/>
+              </a:rPr>
+              <a:t>[1] DimABSA-2026 Task Organizers. 2026. SemEval-2026 Task 3: Dimensional Aspect-Based Sentiment Analysis — Overview. arXiv:2601.23022.</a:t>
+            </a:r>
+          </a:p>
+          <a:p>
+            <a:pPr algn="l">
               <a:lnSpc>
                 <a:spcPct val="100000"/>
               </a:lnSpc>
-            </a:pPr>
-            <a:r>
-              <a:rPr sz="1900" b="1" i="0">
-                <a:solidFill>
-                  <a:srgbClr val="2E8B57"/>
-                </a:solidFill>
-                <a:latin typeface="Arial"/>
-              </a:rPr>
-              <a:t>Takoyaki</a:t>
-            </a:r>
-          </a:p>
-        </p:txBody>
-      </p:sp>
-      <p:sp>
-        <p:nvSpPr>
-          <p:cNvPr id="12" name="TextBox 11"/>
-          <p:cNvSpPr txBox="1"/>
-          <p:nvPr/>
-        </p:nvSpPr>
-        <p:spPr>
-          <a:xfrm>
-            <a:off x="6419088" y="2971800"/>
-            <a:ext cx="2743200" cy="1097280"/>
-          </a:xfrm>
-          <a:prstGeom prst="rect">
-            <a:avLst/>
-          </a:prstGeom>
-          <a:noFill/>
-        </p:spPr>
-        <p:txBody>
-          <a:bodyPr wrap="square" anchor="t">
-            <a:spAutoFit/>
-          </a:bodyPr>
-          <a:lstStyle/>
-          <a:p>
-            <a:pPr algn="ctr">
+              <a:spcBef>
+                <a:spcPts val="0"/>
+              </a:spcBef>
+            </a:pPr>
+            <a:r>
+              <a:rPr sz="1050" b="0" i="0">
+                <a:solidFill>
+                  <a:srgbClr val="6B7280"/>
+                </a:solidFill>
+                <a:latin typeface="Arial"/>
+              </a:rPr>
+              <a:t>[2] LogSigma. 2026. LogSigma at SemEval-2026 Task 3 (DimABSA). In Proc. SemEval-2026.</a:t>
+            </a:r>
+          </a:p>
+          <a:p>
+            <a:pPr algn="l">
               <a:lnSpc>
                 <a:spcPct val="100000"/>
               </a:lnSpc>
-            </a:pPr>
-            <a:r>
-              <a:rPr sz="1500" b="0" i="0">
-                <a:solidFill>
-                  <a:srgbClr val="1A1A1A"/>
-                </a:solidFill>
-                <a:latin typeface="Arial"/>
-              </a:rPr>
-              <a:t>few-shot demonstration
-retrieval</a:t>
-            </a:r>
-          </a:p>
-        </p:txBody>
-      </p:sp>
-      <p:sp>
-        <p:nvSpPr>
-          <p:cNvPr id="13" name="Rounded Rectangle 12"/>
-          <p:cNvSpPr/>
-          <p:nvPr/>
-        </p:nvSpPr>
-        <p:spPr>
-          <a:xfrm>
-            <a:off x="9354311" y="1828800"/>
-            <a:ext cx="2743200" cy="2468880"/>
-          </a:xfrm>
-          <a:prstGeom prst="roundRect">
-            <a:avLst/>
-          </a:prstGeom>
-          <a:solidFill>
-            <a:srgbClr val="E9EDF2"/>
-          </a:solidFill>
-          <a:ln>
-            <a:noFill/>
-          </a:ln>
-          <a:effectLst/>
-        </p:spPr>
-        <p:style>
-          <a:lnRef idx="1">
-            <a:schemeClr val="accent1"/>
-          </a:lnRef>
-          <a:fillRef idx="3">
-            <a:schemeClr val="accent1"/>
-          </a:fillRef>
-          <a:effectRef idx="2">
-            <a:schemeClr val="accent1"/>
-          </a:effectRef>
-          <a:fontRef idx="minor">
-            <a:schemeClr val="lt1"/>
-          </a:fontRef>
-        </p:style>
-        <p:txBody>
-          <a:bodyPr rtlCol="0" anchor="ctr"/>
-          <a:lstStyle/>
-          <a:p>
-            <a:pPr algn="ctr"/>
-          </a:p>
-        </p:txBody>
-      </p:sp>
-      <p:sp>
-        <p:nvSpPr>
-          <p:cNvPr id="14" name="TextBox 13"/>
-          <p:cNvSpPr txBox="1"/>
-          <p:nvPr/>
-        </p:nvSpPr>
-        <p:spPr>
-          <a:xfrm>
-            <a:off x="9354311" y="2148840"/>
-            <a:ext cx="2743200" cy="731520"/>
-          </a:xfrm>
-          <a:prstGeom prst="rect">
-            <a:avLst/>
-          </a:prstGeom>
-          <a:noFill/>
-        </p:spPr>
-        <p:txBody>
-          <a:bodyPr wrap="square" anchor="ctr">
-            <a:spAutoFit/>
-          </a:bodyPr>
-          <a:lstStyle/>
-          <a:p>
-            <a:pPr algn="ctr">
+              <a:spcBef>
+                <a:spcPts val="0"/>
+              </a:spcBef>
+            </a:pPr>
+            <a:r>
+              <a:rPr sz="1050" b="0" i="0">
+                <a:solidFill>
+                  <a:srgbClr val="6B7280"/>
+                </a:solidFill>
+                <a:latin typeface="Arial"/>
+              </a:rPr>
+              <a:t>[3] nchellwig. 2026. SCSG: Self-Consistent Structured Generation at SemEval-2026 Task 3. In Proc. SemEval-2026.</a:t>
+            </a:r>
+          </a:p>
+          <a:p>
+            <a:pPr algn="l">
               <a:lnSpc>
                 <a:spcPct val="100000"/>
               </a:lnSpc>
-            </a:pPr>
-            <a:r>
-              <a:rPr sz="1900" b="1" i="0">
-                <a:solidFill>
-                  <a:srgbClr val="1A1A1A"/>
-                </a:solidFill>
-                <a:latin typeface="Arial"/>
-              </a:rPr>
-              <a:t>NYCU Speech Lab</a:t>
-            </a:r>
-          </a:p>
-        </p:txBody>
-      </p:sp>
-      <p:sp>
-        <p:nvSpPr>
-          <p:cNvPr id="15" name="TextBox 14"/>
-          <p:cNvSpPr txBox="1"/>
-          <p:nvPr/>
-        </p:nvSpPr>
-        <p:spPr>
-          <a:xfrm>
-            <a:off x="9354311" y="2971800"/>
-            <a:ext cx="2743200" cy="1097280"/>
-          </a:xfrm>
-          <a:prstGeom prst="rect">
-            <a:avLst/>
-          </a:prstGeom>
-          <a:noFill/>
-        </p:spPr>
-        <p:txBody>
-          <a:bodyPr wrap="square" anchor="t">
-            <a:spAutoFit/>
-          </a:bodyPr>
-          <a:lstStyle/>
-          <a:p>
-            <a:pPr algn="ctr">
+              <a:spcBef>
+                <a:spcPts val="0"/>
+              </a:spcBef>
+            </a:pPr>
+            <a:r>
+              <a:rPr sz="1050" b="0" i="0">
+                <a:solidFill>
+                  <a:srgbClr val="6B7280"/>
+                </a:solidFill>
+                <a:latin typeface="Arial"/>
+              </a:rPr>
+              <a:t>[4] Takoyaki (CyberAgent). 2026. Takoyaki at SemEval-2026 Task 3. In Proc. SemEval-2026.</a:t>
+            </a:r>
+          </a:p>
+          <a:p>
+            <a:pPr algn="l">
               <a:lnSpc>
                 <a:spcPct val="100000"/>
               </a:lnSpc>
-            </a:pPr>
-            <a:r>
-              <a:rPr sz="1500" b="0" i="0">
-                <a:solidFill>
-                  <a:srgbClr val="1A1A1A"/>
-                </a:solidFill>
-                <a:latin typeface="Arial"/>
-              </a:rPr>
-              <a:t>heterogeneous model
-ensemble + voting</a:t>
-            </a:r>
-          </a:p>
-        </p:txBody>
-      </p:sp>
-      <p:sp>
-        <p:nvSpPr>
-          <p:cNvPr id="16" name="TextBox 15"/>
-          <p:cNvSpPr txBox="1"/>
-          <p:nvPr/>
-        </p:nvSpPr>
-        <p:spPr>
-          <a:xfrm>
-            <a:off x="548640" y="4526280"/>
-            <a:ext cx="11064240" cy="457200"/>
-          </a:xfrm>
-          <a:prstGeom prst="rect">
-            <a:avLst/>
-          </a:prstGeom>
-          <a:noFill/>
-        </p:spPr>
-        <p:txBody>
-          <a:bodyPr wrap="square" anchor="t">
-            <a:spAutoFit/>
-          </a:bodyPr>
-          <a:lstStyle/>
-          <a:p>
-            <a:pPr algn="l">
-              <a:lnSpc>
-                <a:spcPct val="100000"/>
-              </a:lnSpc>
-            </a:pPr>
-            <a:r>
-              <a:rPr sz="1800" b="1" i="0">
-                <a:solidFill>
-                  <a:srgbClr val="1A1A1A"/>
-                </a:solidFill>
-                <a:latin typeface="Arial"/>
-              </a:rPr>
-              <a:t>Our difference: distill into a 440M model — no LLM at inference.</a:t>
-            </a:r>
-          </a:p>
-        </p:txBody>
-      </p:sp>
-      <p:sp>
-        <p:nvSpPr>
-          <p:cNvPr id="17" name="Rectangle 16"/>
-          <p:cNvSpPr/>
-          <p:nvPr/>
-        </p:nvSpPr>
-        <p:spPr>
-          <a:xfrm>
-            <a:off x="548640" y="5394960"/>
-            <a:ext cx="11091672" cy="1005840"/>
-          </a:xfrm>
-          <a:prstGeom prst="rect">
-            <a:avLst/>
-          </a:prstGeom>
-          <a:solidFill>
-            <a:srgbClr val="F4F5F7"/>
-          </a:solidFill>
-          <a:ln>
-            <a:noFill/>
-          </a:ln>
-          <a:effectLst/>
-        </p:spPr>
-        <p:style>
-          <a:lnRef idx="1">
-            <a:schemeClr val="accent1"/>
-          </a:lnRef>
-          <a:fillRef idx="3">
-            <a:schemeClr val="accent1"/>
-          </a:fillRef>
-          <a:effectRef idx="2">
-            <a:schemeClr val="accent1"/>
-          </a:effectRef>
-          <a:fontRef idx="minor">
-            <a:schemeClr val="lt1"/>
-          </a:fontRef>
-        </p:style>
-        <p:txBody>
-          <a:bodyPr rtlCol="0" anchor="ctr"/>
-          <a:lstStyle/>
-          <a:p>
-            <a:pPr algn="ctr"/>
-          </a:p>
-        </p:txBody>
-      </p:sp>
-      <p:sp>
-        <p:nvSpPr>
-          <p:cNvPr id="18" name="TextBox 17"/>
-          <p:cNvSpPr txBox="1"/>
-          <p:nvPr/>
-        </p:nvSpPr>
-        <p:spPr>
-          <a:xfrm>
-            <a:off x="777240" y="5486400"/>
-            <a:ext cx="10698480" cy="914400"/>
-          </a:xfrm>
-          <a:prstGeom prst="rect">
-            <a:avLst/>
-          </a:prstGeom>
-          <a:noFill/>
-        </p:spPr>
-        <p:txBody>
-          <a:bodyPr wrap="square" anchor="t">
-            <a:spAutoFit/>
-          </a:bodyPr>
-          <a:lstStyle/>
-          <a:p>
-            <a:pPr algn="l">
-              <a:lnSpc>
-                <a:spcPct val="105000"/>
-              </a:lnSpc>
-            </a:pPr>
-            <a:r>
-              <a:rPr sz="1250" b="0" i="0">
+              <a:spcBef>
+                <a:spcPts val="0"/>
+              </a:spcBef>
+            </a:pPr>
+            <a:r>
+              <a:rPr sz="1050" b="0" i="0">
                 <a:solidFill>
                   <a:srgbClr val="6B7280"/>
                 </a:solidFill>
                 <a:latin typeface="Arial"/>
               </a:rPr>
-              <a:t>References — SemEval-2026 Task 3 (DimABSA), system description papers; scores from the official task overview (arXiv:2601.23022). LogSigma; nchellwig (SCSG); Takoyaki (CyberAgent); NYCU Speech Lab.</a:t>
-            </a:r>
-          </a:p>
-        </p:txBody>
-      </p:sp>
-      <p:sp>
-        <p:nvSpPr>
-          <p:cNvPr id="19" name="TextBox 18"/>
+              <a:t>[5] NYCU Speech Lab. 2026. NYCU Speech Lab at SemEval-2026 Task 3. In Proc. SemEval-2026.</a:t>
+            </a:r>
+          </a:p>
+        </p:txBody>
+      </p:sp>
+      <p:sp>
+        <p:nvSpPr>
+          <p:cNvPr id="7" name="TextBox 6"/>
           <p:cNvSpPr txBox="1"/>
           <p:nvPr/>
         </p:nvSpPr>
@@ -6084,7 +5364,7 @@
         <p:spPr>
           <a:xfrm>
             <a:off x="548640" y="777240"/>
-            <a:ext cx="11064240" cy="1005840"/>
+            <a:ext cx="11064240" cy="960120"/>
           </a:xfrm>
           <a:prstGeom prst="rect">
             <a:avLst/>
@@ -6103,7 +5383,7 @@
               </a:lnSpc>
             </a:pPr>
             <a:r>
-              <a:rPr sz="3300" b="1" i="0">
+              <a:rPr sz="3200" b="1" i="0">
                 <a:solidFill>
                   <a:srgbClr val="1A1A1A"/>
                 </a:solidFill>
@@ -6714,8 +5994,8 @@
         </p:nvSpPr>
         <p:spPr>
           <a:xfrm>
-            <a:off x="548640" y="5486400"/>
-            <a:ext cx="11091672" cy="914400"/>
+            <a:off x="548640" y="5440680"/>
+            <a:ext cx="11091672" cy="960120"/>
           </a:xfrm>
           <a:prstGeom prst="rect">
             <a:avLst/>
@@ -6758,8 +6038,8 @@
         </p:nvSpPr>
         <p:spPr>
           <a:xfrm>
-            <a:off x="548640" y="5486400"/>
-            <a:ext cx="118872" cy="914400"/>
+            <a:off x="548640" y="5440680"/>
+            <a:ext cx="118872" cy="960120"/>
           </a:xfrm>
           <a:prstGeom prst="rect">
             <a:avLst/>
@@ -6802,7 +6082,7 @@
         </p:nvSpPr>
         <p:spPr>
           <a:xfrm>
-            <a:off x="868680" y="5596128"/>
+            <a:off x="868680" y="5559552"/>
             <a:ext cx="10607040" cy="320040"/>
           </a:xfrm>
           <a:prstGeom prst="rect">
@@ -6828,7 +6108,7 @@
                 </a:solidFill>
                 <a:latin typeface="Arial"/>
               </a:rPr>
-              <a:t>Takeaway</a:t>
+              <a:t>Conclusion</a:t>
             </a:r>
           </a:p>
         </p:txBody>
@@ -6841,7 +6121,7 @@
         </p:nvSpPr>
         <p:spPr>
           <a:xfrm>
-            <a:off x="868680" y="5907024"/>
+            <a:off x="868680" y="5879592"/>
             <a:ext cx="10607040" cy="457200"/>
           </a:xfrm>
           <a:prstGeom prst="rect">
@@ -6867,7 +6147,7 @@
                 </a:solidFill>
                 <a:latin typeface="Arial"/>
               </a:rPr>
-              <a:t>+1.2 to +5.9 pp over published SOTA. Note: our scores are dev set; SOTA scores are test set.</a:t>
+              <a:t>+1.2 to +5.9 pp over published SOTA.   (Our scores: dev set; SOTA: test set.)</a:t>
             </a:r>
           </a:p>
         </p:txBody>
@@ -6977,7 +6257,7 @@
         <p:spPr>
           <a:xfrm>
             <a:off x="548640" y="777240"/>
-            <a:ext cx="11064240" cy="1005840"/>
+            <a:ext cx="11064240" cy="960120"/>
           </a:xfrm>
           <a:prstGeom prst="rect">
             <a:avLst/>
@@ -6996,33 +6276,173 @@
               </a:lnSpc>
             </a:pPr>
             <a:r>
-              <a:rPr sz="3300" b="1" i="0">
+              <a:rPr sz="3200" b="1" i="0">
                 <a:solidFill>
                   <a:srgbClr val="1A1A1A"/>
                 </a:solidFill>
                 <a:latin typeface="Arial"/>
               </a:rPr>
-              <a:t>KD does not help 3 strong / dense datasets</a:t>
-            </a:r>
-          </a:p>
-        </p:txBody>
-      </p:sp>
-      <p:sp>
-        <p:nvSpPr>
-          <p:cNvPr id="4" name="Rounded Rectangle 3"/>
+              <a:t>KD hurts 3 already-strong datasets</a:t>
+            </a:r>
+          </a:p>
+        </p:txBody>
+      </p:sp>
+      <p:sp>
+        <p:nvSpPr>
+          <p:cNvPr id="4" name="TextBox 3"/>
+          <p:cNvSpPr txBox="1"/>
+          <p:nvPr/>
+        </p:nvSpPr>
+        <p:spPr>
+          <a:xfrm>
+            <a:off x="640080" y="2011680"/>
+            <a:ext cx="10972800" cy="4572000"/>
+          </a:xfrm>
+          <a:prstGeom prst="rect">
+            <a:avLst/>
+          </a:prstGeom>
+          <a:noFill/>
+        </p:spPr>
+        <p:txBody>
+          <a:bodyPr wrap="square" anchor="t">
+            <a:spAutoFit/>
+          </a:bodyPr>
+          <a:lstStyle/>
+          <a:p>
+            <a:pPr algn="l">
+              <a:lnSpc>
+                <a:spcPct val="100000"/>
+              </a:lnSpc>
+              <a:spcAft>
+                <a:spcPts val="810"/>
+              </a:spcAft>
+            </a:pPr>
+            <a:r>
+              <a:rPr sz="2000" b="1" i="0">
+                <a:solidFill>
+                  <a:srgbClr val="2E75B6"/>
+                </a:solidFill>
+                <a:latin typeface="Arial"/>
+              </a:rPr>
+              <a:t>▪  </a:t>
+            </a:r>
+            <a:r>
+              <a:rPr sz="2000" b="1" i="0">
+                <a:solidFill>
+                  <a:srgbClr val="1A1A1A"/>
+                </a:solidFill>
+                <a:latin typeface="Arial"/>
+              </a:rPr>
+              <a:t>jpn_hotel:</a:t>
+            </a:r>
+            <a:r>
+              <a:rPr sz="2000" b="0" i="0">
+                <a:solidFill>
+                  <a:srgbClr val="1A1A1A"/>
+                </a:solidFill>
+                <a:latin typeface="Arial"/>
+              </a:rPr>
+              <a:t>  KD 0.4281  &lt;  baseline 0.4466   (strong native encoder)</a:t>
+            </a:r>
+          </a:p>
+          <a:p>
+            <a:pPr algn="l">
+              <a:lnSpc>
+                <a:spcPct val="100000"/>
+              </a:lnSpc>
+              <a:spcBef>
+                <a:spcPts val="0"/>
+              </a:spcBef>
+              <a:spcAft>
+                <a:spcPts val="810"/>
+              </a:spcAft>
+            </a:pPr>
+            <a:r>
+              <a:rPr sz="2000" b="1" i="0">
+                <a:solidFill>
+                  <a:srgbClr val="2E75B6"/>
+                </a:solidFill>
+                <a:latin typeface="Arial"/>
+              </a:rPr>
+              <a:t>▪  </a:t>
+            </a:r>
+            <a:r>
+              <a:rPr sz="2000" b="1" i="0">
+                <a:solidFill>
+                  <a:srgbClr val="1A1A1A"/>
+                </a:solidFill>
+                <a:latin typeface="Arial"/>
+              </a:rPr>
+              <a:t>eng_restaurant:</a:t>
+            </a:r>
+            <a:r>
+              <a:rPr sz="2000" b="0" i="0">
+                <a:solidFill>
+                  <a:srgbClr val="1A1A1A"/>
+                </a:solidFill>
+                <a:latin typeface="Arial"/>
+              </a:rPr>
+              <a:t>  KD 0.4043  &lt;  baseline 0.6554   (gold drowned by 2× silver)</a:t>
+            </a:r>
+          </a:p>
+          <a:p>
+            <a:pPr algn="l">
+              <a:lnSpc>
+                <a:spcPct val="100000"/>
+              </a:lnSpc>
+              <a:spcBef>
+                <a:spcPts val="0"/>
+              </a:spcBef>
+              <a:spcAft>
+                <a:spcPts val="810"/>
+              </a:spcAft>
+            </a:pPr>
+            <a:r>
+              <a:rPr sz="2000" b="1" i="0">
+                <a:solidFill>
+                  <a:srgbClr val="2E75B6"/>
+                </a:solidFill>
+                <a:latin typeface="Arial"/>
+              </a:rPr>
+              <a:t>▪  </a:t>
+            </a:r>
+            <a:r>
+              <a:rPr sz="2000" b="1" i="0">
+                <a:solidFill>
+                  <a:srgbClr val="1A1A1A"/>
+                </a:solidFill>
+                <a:latin typeface="Arial"/>
+              </a:rPr>
+              <a:t>zho_laptop:</a:t>
+            </a:r>
+            <a:r>
+              <a:rPr sz="2000" b="0" i="0">
+                <a:solidFill>
+                  <a:srgbClr val="1A1A1A"/>
+                </a:solidFill>
+                <a:latin typeface="Arial"/>
+              </a:rPr>
+              <a:t>  KD 0.4454  &lt;  baseline 0.4487   (base already augmented)</a:t>
+            </a:r>
+          </a:p>
+        </p:txBody>
+      </p:sp>
+      <p:sp>
+        <p:nvSpPr>
+          <p:cNvPr id="5" name="Rectangle 4"/>
           <p:cNvSpPr/>
           <p:nvPr/>
         </p:nvSpPr>
         <p:spPr>
           <a:xfrm>
-            <a:off x="548640" y="1920240"/>
-            <a:ext cx="3520440" cy="2651760"/>
-          </a:xfrm>
-          <a:prstGeom prst="roundRect">
+            <a:off x="548640" y="5440680"/>
+            <a:ext cx="11091672" cy="960120"/>
+          </a:xfrm>
+          <a:prstGeom prst="rect">
             <a:avLst/>
           </a:prstGeom>
           <a:solidFill>
-            <a:srgbClr val="FBE3DE"/>
+            <a:srgbClr val="FFF6D6"/>
           </a:solidFill>
           <a:ln>
             <a:noFill/>
@@ -7053,137 +6473,20 @@
       </p:sp>
       <p:sp>
         <p:nvSpPr>
-          <p:cNvPr id="5" name="TextBox 4"/>
-          <p:cNvSpPr txBox="1"/>
+          <p:cNvPr id="6" name="Rectangle 5"/>
+          <p:cNvSpPr/>
           <p:nvPr/>
         </p:nvSpPr>
         <p:spPr>
           <a:xfrm>
-            <a:off x="548640" y="2397556"/>
-            <a:ext cx="3520440" cy="1113739"/>
+            <a:off x="548640" y="5440680"/>
+            <a:ext cx="118872" cy="960120"/>
           </a:xfrm>
           <a:prstGeom prst="rect">
             <a:avLst/>
           </a:prstGeom>
-          <a:noFill/>
-        </p:spPr>
-        <p:txBody>
-          <a:bodyPr wrap="square" anchor="ctr">
-            <a:spAutoFit/>
-          </a:bodyPr>
-          <a:lstStyle/>
-          <a:p>
-            <a:pPr algn="ctr">
-              <a:lnSpc>
-                <a:spcPct val="100000"/>
-              </a:lnSpc>
-            </a:pPr>
-            <a:r>
-              <a:rPr sz="4600" b="1" i="0">
-                <a:solidFill>
-                  <a:srgbClr val="C0392B"/>
-                </a:solidFill>
-                <a:latin typeface="Arial"/>
-              </a:rPr>
-              <a:t>−1.8</a:t>
-            </a:r>
-          </a:p>
-        </p:txBody>
-      </p:sp>
-      <p:sp>
-        <p:nvSpPr>
-          <p:cNvPr id="6" name="TextBox 5"/>
-          <p:cNvSpPr txBox="1"/>
-          <p:nvPr/>
-        </p:nvSpPr>
-        <p:spPr>
-          <a:xfrm>
-            <a:off x="548640" y="3378708"/>
-            <a:ext cx="3520440" cy="583387"/>
-          </a:xfrm>
-          <a:prstGeom prst="rect">
-            <a:avLst/>
-          </a:prstGeom>
-          <a:noFill/>
-        </p:spPr>
-        <p:txBody>
-          <a:bodyPr wrap="square" anchor="t">
-            <a:spAutoFit/>
-          </a:bodyPr>
-          <a:lstStyle/>
-          <a:p>
-            <a:pPr algn="ctr">
-              <a:lnSpc>
-                <a:spcPct val="100000"/>
-              </a:lnSpc>
-            </a:pPr>
-            <a:r>
-              <a:rPr sz="1700" b="1" i="0">
-                <a:solidFill>
-                  <a:srgbClr val="1A1A1A"/>
-                </a:solidFill>
-                <a:latin typeface="Arial"/>
-              </a:rPr>
-              <a:t>jpn_hotel</a:t>
-            </a:r>
-          </a:p>
-        </p:txBody>
-      </p:sp>
-      <p:sp>
-        <p:nvSpPr>
-          <p:cNvPr id="7" name="TextBox 6"/>
-          <p:cNvSpPr txBox="1"/>
-          <p:nvPr/>
-        </p:nvSpPr>
-        <p:spPr>
-          <a:xfrm>
-            <a:off x="548640" y="3935577"/>
-            <a:ext cx="3520440" cy="530352"/>
-          </a:xfrm>
-          <a:prstGeom prst="rect">
-            <a:avLst/>
-          </a:prstGeom>
-          <a:noFill/>
-        </p:spPr>
-        <p:txBody>
-          <a:bodyPr wrap="square" anchor="t">
-            <a:spAutoFit/>
-          </a:bodyPr>
-          <a:lstStyle/>
-          <a:p>
-            <a:pPr algn="ctr">
-              <a:lnSpc>
-                <a:spcPct val="100000"/>
-              </a:lnSpc>
-            </a:pPr>
-            <a:r>
-              <a:rPr sz="1250" b="0" i="1">
-                <a:solidFill>
-                  <a:srgbClr val="6B7280"/>
-                </a:solidFill>
-                <a:latin typeface="Arial"/>
-              </a:rPr>
-              <a:t>KD 0.4281 &lt; base 0.4466</a:t>
-            </a:r>
-          </a:p>
-        </p:txBody>
-      </p:sp>
-      <p:sp>
-        <p:nvSpPr>
-          <p:cNvPr id="8" name="Rounded Rectangle 7"/>
-          <p:cNvSpPr/>
-          <p:nvPr/>
-        </p:nvSpPr>
-        <p:spPr>
-          <a:xfrm>
-            <a:off x="4334256" y="1920240"/>
-            <a:ext cx="3520440" cy="2651760"/>
-          </a:xfrm>
-          <a:prstGeom prst="roundRect">
-            <a:avLst/>
-          </a:prstGeom>
           <a:solidFill>
-            <a:srgbClr val="FBE3DE"/>
+            <a:srgbClr val="F0A500"/>
           </a:solidFill>
           <a:ln>
             <a:noFill/>
@@ -7214,14 +6517,14 @@
       </p:sp>
       <p:sp>
         <p:nvSpPr>
-          <p:cNvPr id="9" name="TextBox 8"/>
+          <p:cNvPr id="7" name="TextBox 6"/>
           <p:cNvSpPr txBox="1"/>
           <p:nvPr/>
         </p:nvSpPr>
         <p:spPr>
           <a:xfrm>
-            <a:off x="4334256" y="2397556"/>
-            <a:ext cx="3520440" cy="1113739"/>
+            <a:off x="868680" y="5559552"/>
+            <a:ext cx="10607040" cy="320040"/>
           </a:xfrm>
           <a:prstGeom prst="rect">
             <a:avLst/>
@@ -7229,38 +6532,38 @@
           <a:noFill/>
         </p:spPr>
         <p:txBody>
-          <a:bodyPr wrap="square" anchor="ctr">
+          <a:bodyPr wrap="square" anchor="t">
             <a:spAutoFit/>
           </a:bodyPr>
           <a:lstStyle/>
           <a:p>
-            <a:pPr algn="ctr">
+            <a:pPr algn="l">
               <a:lnSpc>
                 <a:spcPct val="100000"/>
               </a:lnSpc>
             </a:pPr>
             <a:r>
-              <a:rPr sz="4600" b="1" i="0">
-                <a:solidFill>
-                  <a:srgbClr val="C0392B"/>
-                </a:solidFill>
-                <a:latin typeface="Arial"/>
-              </a:rPr>
-              <a:t>−25</a:t>
-            </a:r>
-          </a:p>
-        </p:txBody>
-      </p:sp>
-      <p:sp>
-        <p:nvSpPr>
-          <p:cNvPr id="10" name="TextBox 9"/>
+              <a:rPr sz="1500" b="1" i="0">
+                <a:solidFill>
+                  <a:srgbClr val="E08600"/>
+                </a:solidFill>
+                <a:latin typeface="Arial"/>
+              </a:rPr>
+              <a:t>Conclusion</a:t>
+            </a:r>
+          </a:p>
+        </p:txBody>
+      </p:sp>
+      <p:sp>
+        <p:nvSpPr>
+          <p:cNvPr id="8" name="TextBox 7"/>
           <p:cNvSpPr txBox="1"/>
           <p:nvPr/>
         </p:nvSpPr>
         <p:spPr>
           <a:xfrm>
-            <a:off x="4334256" y="3378708"/>
-            <a:ext cx="3520440" cy="583387"/>
+            <a:off x="868680" y="5879592"/>
+            <a:ext cx="10607040" cy="457200"/>
           </a:xfrm>
           <a:prstGeom prst="rect">
             <a:avLst/>
@@ -7273,392 +6576,26 @@
           </a:bodyPr>
           <a:lstStyle/>
           <a:p>
-            <a:pPr algn="ctr">
+            <a:pPr algn="l">
               <a:lnSpc>
                 <a:spcPct val="100000"/>
               </a:lnSpc>
             </a:pPr>
             <a:r>
-              <a:rPr sz="1700" b="1" i="0">
+              <a:rPr sz="1800" b="1" i="0">
                 <a:solidFill>
                   <a:srgbClr val="1A1A1A"/>
                 </a:solidFill>
                 <a:latin typeface="Arial"/>
               </a:rPr>
-              <a:t>eng_restaurant</a:t>
-            </a:r>
-          </a:p>
-        </p:txBody>
-      </p:sp>
-      <p:sp>
-        <p:nvSpPr>
-          <p:cNvPr id="11" name="TextBox 10"/>
-          <p:cNvSpPr txBox="1"/>
-          <p:nvPr/>
-        </p:nvSpPr>
-        <p:spPr>
-          <a:xfrm>
-            <a:off x="4334256" y="3935577"/>
-            <a:ext cx="3520440" cy="530352"/>
-          </a:xfrm>
-          <a:prstGeom prst="rect">
-            <a:avLst/>
-          </a:prstGeom>
-          <a:noFill/>
-        </p:spPr>
-        <p:txBody>
-          <a:bodyPr wrap="square" anchor="t">
-            <a:spAutoFit/>
-          </a:bodyPr>
-          <a:lstStyle/>
-          <a:p>
-            <a:pPr algn="ctr">
-              <a:lnSpc>
-                <a:spcPct val="100000"/>
-              </a:lnSpc>
-            </a:pPr>
-            <a:r>
-              <a:rPr sz="1250" b="0" i="1">
-                <a:solidFill>
-                  <a:srgbClr val="6B7280"/>
-                </a:solidFill>
-                <a:latin typeface="Arial"/>
-              </a:rPr>
-              <a:t>KD 0.4043 &lt; base 0.6554</a:t>
-            </a:r>
-          </a:p>
-        </p:txBody>
-      </p:sp>
-      <p:sp>
-        <p:nvSpPr>
-          <p:cNvPr id="12" name="Rounded Rectangle 11"/>
-          <p:cNvSpPr/>
-          <p:nvPr/>
-        </p:nvSpPr>
-        <p:spPr>
-          <a:xfrm>
-            <a:off x="8119872" y="1920240"/>
-            <a:ext cx="3520440" cy="2651760"/>
-          </a:xfrm>
-          <a:prstGeom prst="roundRect">
-            <a:avLst/>
-          </a:prstGeom>
-          <a:solidFill>
-            <a:srgbClr val="FBE3DE"/>
-          </a:solidFill>
-          <a:ln>
-            <a:noFill/>
-          </a:ln>
-          <a:effectLst/>
-        </p:spPr>
-        <p:style>
-          <a:lnRef idx="1">
-            <a:schemeClr val="accent1"/>
-          </a:lnRef>
-          <a:fillRef idx="3">
-            <a:schemeClr val="accent1"/>
-          </a:fillRef>
-          <a:effectRef idx="2">
-            <a:schemeClr val="accent1"/>
-          </a:effectRef>
-          <a:fontRef idx="minor">
-            <a:schemeClr val="lt1"/>
-          </a:fontRef>
-        </p:style>
-        <p:txBody>
-          <a:bodyPr rtlCol="0" anchor="ctr"/>
-          <a:lstStyle/>
-          <a:p>
-            <a:pPr algn="ctr"/>
-          </a:p>
-        </p:txBody>
-      </p:sp>
-      <p:sp>
-        <p:nvSpPr>
-          <p:cNvPr id="13" name="TextBox 12"/>
-          <p:cNvSpPr txBox="1"/>
-          <p:nvPr/>
-        </p:nvSpPr>
-        <p:spPr>
-          <a:xfrm>
-            <a:off x="8119872" y="2397556"/>
-            <a:ext cx="3520440" cy="1113739"/>
-          </a:xfrm>
-          <a:prstGeom prst="rect">
-            <a:avLst/>
-          </a:prstGeom>
-          <a:noFill/>
-        </p:spPr>
-        <p:txBody>
-          <a:bodyPr wrap="square" anchor="ctr">
-            <a:spAutoFit/>
-          </a:bodyPr>
-          <a:lstStyle/>
-          <a:p>
-            <a:pPr algn="ctr">
-              <a:lnSpc>
-                <a:spcPct val="100000"/>
-              </a:lnSpc>
-            </a:pPr>
-            <a:r>
-              <a:rPr sz="4600" b="1" i="0">
-                <a:solidFill>
-                  <a:srgbClr val="C0392B"/>
-                </a:solidFill>
-                <a:latin typeface="Arial"/>
-              </a:rPr>
-              <a:t>−0.3</a:t>
-            </a:r>
-          </a:p>
-        </p:txBody>
-      </p:sp>
-      <p:sp>
-        <p:nvSpPr>
-          <p:cNvPr id="14" name="TextBox 13"/>
-          <p:cNvSpPr txBox="1"/>
-          <p:nvPr/>
-        </p:nvSpPr>
-        <p:spPr>
-          <a:xfrm>
-            <a:off x="8119872" y="3378708"/>
-            <a:ext cx="3520440" cy="583387"/>
-          </a:xfrm>
-          <a:prstGeom prst="rect">
-            <a:avLst/>
-          </a:prstGeom>
-          <a:noFill/>
-        </p:spPr>
-        <p:txBody>
-          <a:bodyPr wrap="square" anchor="t">
-            <a:spAutoFit/>
-          </a:bodyPr>
-          <a:lstStyle/>
-          <a:p>
-            <a:pPr algn="ctr">
-              <a:lnSpc>
-                <a:spcPct val="100000"/>
-              </a:lnSpc>
-            </a:pPr>
-            <a:r>
-              <a:rPr sz="1700" b="1" i="0">
-                <a:solidFill>
-                  <a:srgbClr val="1A1A1A"/>
-                </a:solidFill>
-                <a:latin typeface="Arial"/>
-              </a:rPr>
-              <a:t>zho_laptop</a:t>
-            </a:r>
-          </a:p>
-        </p:txBody>
-      </p:sp>
-      <p:sp>
-        <p:nvSpPr>
-          <p:cNvPr id="15" name="TextBox 14"/>
-          <p:cNvSpPr txBox="1"/>
-          <p:nvPr/>
-        </p:nvSpPr>
-        <p:spPr>
-          <a:xfrm>
-            <a:off x="8119872" y="3935577"/>
-            <a:ext cx="3520440" cy="530352"/>
-          </a:xfrm>
-          <a:prstGeom prst="rect">
-            <a:avLst/>
-          </a:prstGeom>
-          <a:noFill/>
-        </p:spPr>
-        <p:txBody>
-          <a:bodyPr wrap="square" anchor="t">
-            <a:spAutoFit/>
-          </a:bodyPr>
-          <a:lstStyle/>
-          <a:p>
-            <a:pPr algn="ctr">
-              <a:lnSpc>
-                <a:spcPct val="100000"/>
-              </a:lnSpc>
-            </a:pPr>
-            <a:r>
-              <a:rPr sz="1250" b="0" i="1">
-                <a:solidFill>
-                  <a:srgbClr val="6B7280"/>
-                </a:solidFill>
-                <a:latin typeface="Arial"/>
-              </a:rPr>
-              <a:t>KD 0.4454 &lt; base 0.4487</a:t>
-            </a:r>
-          </a:p>
-        </p:txBody>
-      </p:sp>
-      <p:sp>
-        <p:nvSpPr>
-          <p:cNvPr id="16" name="Rectangle 15"/>
-          <p:cNvSpPr/>
-          <p:nvPr/>
-        </p:nvSpPr>
-        <p:spPr>
-          <a:xfrm>
-            <a:off x="548640" y="5486400"/>
-            <a:ext cx="11091672" cy="914400"/>
-          </a:xfrm>
-          <a:prstGeom prst="rect">
-            <a:avLst/>
-          </a:prstGeom>
-          <a:solidFill>
-            <a:srgbClr val="FFF6D6"/>
-          </a:solidFill>
-          <a:ln>
-            <a:noFill/>
-          </a:ln>
-          <a:effectLst/>
-        </p:spPr>
-        <p:style>
-          <a:lnRef idx="1">
-            <a:schemeClr val="accent1"/>
-          </a:lnRef>
-          <a:fillRef idx="3">
-            <a:schemeClr val="accent1"/>
-          </a:fillRef>
-          <a:effectRef idx="2">
-            <a:schemeClr val="accent1"/>
-          </a:effectRef>
-          <a:fontRef idx="minor">
-            <a:schemeClr val="lt1"/>
-          </a:fontRef>
-        </p:style>
-        <p:txBody>
-          <a:bodyPr rtlCol="0" anchor="ctr"/>
-          <a:lstStyle/>
-          <a:p>
-            <a:pPr algn="ctr"/>
-          </a:p>
-        </p:txBody>
-      </p:sp>
-      <p:sp>
-        <p:nvSpPr>
-          <p:cNvPr id="17" name="Rectangle 16"/>
-          <p:cNvSpPr/>
-          <p:nvPr/>
-        </p:nvSpPr>
-        <p:spPr>
-          <a:xfrm>
-            <a:off x="548640" y="5486400"/>
-            <a:ext cx="118872" cy="914400"/>
-          </a:xfrm>
-          <a:prstGeom prst="rect">
-            <a:avLst/>
-          </a:prstGeom>
-          <a:solidFill>
-            <a:srgbClr val="F0A500"/>
-          </a:solidFill>
-          <a:ln>
-            <a:noFill/>
-          </a:ln>
-          <a:effectLst/>
-        </p:spPr>
-        <p:style>
-          <a:lnRef idx="1">
-            <a:schemeClr val="accent1"/>
-          </a:lnRef>
-          <a:fillRef idx="3">
-            <a:schemeClr val="accent1"/>
-          </a:fillRef>
-          <a:effectRef idx="2">
-            <a:schemeClr val="accent1"/>
-          </a:effectRef>
-          <a:fontRef idx="minor">
-            <a:schemeClr val="lt1"/>
-          </a:fontRef>
-        </p:style>
-        <p:txBody>
-          <a:bodyPr rtlCol="0" anchor="ctr"/>
-          <a:lstStyle/>
-          <a:p>
-            <a:pPr algn="ctr"/>
-          </a:p>
-        </p:txBody>
-      </p:sp>
-      <p:sp>
-        <p:nvSpPr>
-          <p:cNvPr id="18" name="TextBox 17"/>
-          <p:cNvSpPr txBox="1"/>
-          <p:nvPr/>
-        </p:nvSpPr>
-        <p:spPr>
-          <a:xfrm>
-            <a:off x="868680" y="5596128"/>
-            <a:ext cx="10607040" cy="320040"/>
-          </a:xfrm>
-          <a:prstGeom prst="rect">
-            <a:avLst/>
-          </a:prstGeom>
-          <a:noFill/>
-        </p:spPr>
-        <p:txBody>
-          <a:bodyPr wrap="square" anchor="t">
-            <a:spAutoFit/>
-          </a:bodyPr>
-          <a:lstStyle/>
-          <a:p>
-            <a:pPr algn="l">
-              <a:lnSpc>
-                <a:spcPct val="100000"/>
-              </a:lnSpc>
-            </a:pPr>
-            <a:r>
-              <a:rPr sz="1500" b="1" i="0">
-                <a:solidFill>
-                  <a:srgbClr val="E08600"/>
-                </a:solidFill>
-                <a:latin typeface="Arial"/>
-              </a:rPr>
-              <a:t>Takeaway</a:t>
-            </a:r>
-          </a:p>
-        </p:txBody>
-      </p:sp>
-      <p:sp>
-        <p:nvSpPr>
-          <p:cNvPr id="19" name="TextBox 18"/>
-          <p:cNvSpPr txBox="1"/>
-          <p:nvPr/>
-        </p:nvSpPr>
-        <p:spPr>
-          <a:xfrm>
-            <a:off x="868680" y="5907024"/>
-            <a:ext cx="10607040" cy="457200"/>
-          </a:xfrm>
-          <a:prstGeom prst="rect">
-            <a:avLst/>
-          </a:prstGeom>
-          <a:noFill/>
-        </p:spPr>
-        <p:txBody>
-          <a:bodyPr wrap="square" anchor="t">
-            <a:spAutoFit/>
-          </a:bodyPr>
-          <a:lstStyle/>
-          <a:p>
-            <a:pPr algn="l">
-              <a:lnSpc>
-                <a:spcPct val="100000"/>
-              </a:lnSpc>
-            </a:pPr>
-            <a:r>
-              <a:rPr sz="1800" b="1" i="0">
-                <a:solidFill>
-                  <a:srgbClr val="1A1A1A"/>
-                </a:solidFill>
-                <a:latin typeface="Arial"/>
-              </a:rPr>
-              <a:t>When the baseline is already strong, noisy silver only hurts — we keep the baseline for these 3.</a:t>
-            </a:r>
-          </a:p>
-        </p:txBody>
-      </p:sp>
-      <p:sp>
-        <p:nvSpPr>
-          <p:cNvPr id="20" name="TextBox 19"/>
+              <a:t>When the baseline is already strong, noisy silver only hurts — we keep the baseline.</a:t>
+            </a:r>
+          </a:p>
+        </p:txBody>
+      </p:sp>
+      <p:sp>
+        <p:nvSpPr>
+          <p:cNvPr id="9" name="TextBox 8"/>
           <p:cNvSpPr txBox="1"/>
           <p:nvPr/>
         </p:nvSpPr>
@@ -7761,7 +6698,7 @@
         <p:spPr>
           <a:xfrm>
             <a:off x="548640" y="777240"/>
-            <a:ext cx="11064240" cy="1005840"/>
+            <a:ext cx="11064240" cy="960120"/>
           </a:xfrm>
           <a:prstGeom prst="rect">
             <a:avLst/>
@@ -7780,7 +6717,7 @@
               </a:lnSpc>
             </a:pPr>
             <a:r>
-              <a:rPr sz="3300" b="1" i="0">
+              <a:rPr sz="3200" b="1" i="0">
                 <a:solidFill>
                   <a:srgbClr val="1A1A1A"/>
                 </a:solidFill>
@@ -7793,20 +6730,182 @@
       </p:sp>
       <p:sp>
         <p:nvSpPr>
-          <p:cNvPr id="4" name="Rounded Rectangle 3"/>
+          <p:cNvPr id="4" name="TextBox 3"/>
+          <p:cNvSpPr txBox="1"/>
+          <p:nvPr/>
+        </p:nvSpPr>
+        <p:spPr>
+          <a:xfrm>
+            <a:off x="640080" y="2011680"/>
+            <a:ext cx="10972800" cy="4572000"/>
+          </a:xfrm>
+          <a:prstGeom prst="rect">
+            <a:avLst/>
+          </a:prstGeom>
+          <a:noFill/>
+        </p:spPr>
+        <p:txBody>
+          <a:bodyPr wrap="square" anchor="t">
+            <a:spAutoFit/>
+          </a:bodyPr>
+          <a:lstStyle/>
+          <a:p>
+            <a:pPr algn="l">
+              <a:lnSpc>
+                <a:spcPct val="100000"/>
+              </a:lnSpc>
+              <a:spcAft>
+                <a:spcPts val="810"/>
+              </a:spcAft>
+            </a:pPr>
+            <a:r>
+              <a:rPr sz="2000" b="1" i="0">
+                <a:solidFill>
+                  <a:srgbClr val="2E75B6"/>
+                </a:solidFill>
+                <a:latin typeface="Arial"/>
+              </a:rPr>
+              <a:t>▪  </a:t>
+            </a:r>
+            <a:r>
+              <a:rPr sz="2000" b="1" i="0">
+                <a:solidFill>
+                  <a:srgbClr val="1A1A1A"/>
+                </a:solidFill>
+                <a:latin typeface="Arial"/>
+              </a:rPr>
+              <a:t>eng_laptop, only the teacher changes:</a:t>
+            </a:r>
+          </a:p>
+          <a:p>
+            <a:pPr algn="l">
+              <a:lnSpc>
+                <a:spcPct val="100000"/>
+              </a:lnSpc>
+              <a:spcBef>
+                <a:spcPts val="0"/>
+              </a:spcBef>
+              <a:spcAft>
+                <a:spcPts val="810"/>
+              </a:spcAft>
+            </a:pPr>
+            <a:r>
+              <a:rPr sz="1800" b="0" i="0">
+                <a:solidFill>
+                  <a:srgbClr val="6B7280"/>
+                </a:solidFill>
+                <a:latin typeface="Arial"/>
+              </a:rPr>
+              <a:t>        –  </a:t>
+            </a:r>
+            <a:r>
+              <a:rPr sz="1800" b="0" i="0">
+                <a:solidFill>
+                  <a:srgbClr val="1A1A1A"/>
+                </a:solidFill>
+                <a:latin typeface="Arial"/>
+              </a:rPr>
+              <a:t>no-KD 0.3254  →  Gemma-31B 0.3764  →  Qwen-36B 0.4094  →  DeepSeek 0.4141</a:t>
+            </a:r>
+          </a:p>
+          <a:p>
+            <a:pPr algn="l">
+              <a:lnSpc>
+                <a:spcPct val="100000"/>
+              </a:lnSpc>
+              <a:spcBef>
+                <a:spcPts val="0"/>
+              </a:spcBef>
+              <a:spcAft>
+                <a:spcPts val="810"/>
+              </a:spcAft>
+            </a:pPr>
+            <a:r>
+              <a:rPr sz="2000" b="1" i="0">
+                <a:solidFill>
+                  <a:srgbClr val="2E75B6"/>
+                </a:solidFill>
+                <a:latin typeface="Arial"/>
+              </a:rPr>
+              <a:t>▪  </a:t>
+            </a:r>
+            <a:r>
+              <a:rPr sz="2000" b="1" i="0">
+                <a:solidFill>
+                  <a:srgbClr val="1A1A1A"/>
+                </a:solidFill>
+                <a:latin typeface="Arial"/>
+              </a:rPr>
+              <a:t>Local Qwen recovers 95%</a:t>
+            </a:r>
+            <a:r>
+              <a:rPr sz="2000" b="0" i="0">
+                <a:solidFill>
+                  <a:srgbClr val="1A1A1A"/>
+                </a:solidFill>
+                <a:latin typeface="Arial"/>
+              </a:rPr>
+              <a:t>  of the cloud teacher's gain</a:t>
+            </a:r>
+          </a:p>
+          <a:p>
+            <a:pPr algn="l">
+              <a:lnSpc>
+                <a:spcPct val="100000"/>
+              </a:lnSpc>
+              <a:spcBef>
+                <a:spcPts val="0"/>
+              </a:spcBef>
+              <a:spcAft>
+                <a:spcPts val="810"/>
+              </a:spcAft>
+            </a:pPr>
+            <a:r>
+              <a:rPr sz="2000" b="1" i="0">
+                <a:solidFill>
+                  <a:srgbClr val="2E75B6"/>
+                </a:solidFill>
+                <a:latin typeface="Arial"/>
+              </a:rPr>
+              <a:t>▪  </a:t>
+            </a:r>
+            <a:r>
+              <a:rPr sz="2000" b="1" i="0">
+                <a:solidFill>
+                  <a:srgbClr val="1A1A1A"/>
+                </a:solidFill>
+                <a:latin typeface="Arial"/>
+              </a:rPr>
+              <a:t>4 languages:</a:t>
+            </a:r>
+            <a:r>
+              <a:rPr sz="2000" b="0" i="0">
+                <a:solidFill>
+                  <a:srgbClr val="1A1A1A"/>
+                </a:solidFill>
+                <a:latin typeface="Arial"/>
+              </a:rPr>
+              <a:t>  average gap ≈ −2.5 pp; on Tatar, Qwen beats DeepSeek</a:t>
+            </a:r>
+          </a:p>
+        </p:txBody>
+      </p:sp>
+      <p:sp>
+        <p:nvSpPr>
+          <p:cNvPr id="5" name="Rectangle 4"/>
           <p:cNvSpPr/>
           <p:nvPr/>
         </p:nvSpPr>
         <p:spPr>
           <a:xfrm>
-            <a:off x="548640" y="1920240"/>
-            <a:ext cx="2697480" cy="2651760"/>
-          </a:xfrm>
-          <a:prstGeom prst="roundRect">
+            <a:off x="548640" y="5440680"/>
+            <a:ext cx="11091672" cy="960120"/>
+          </a:xfrm>
+          <a:prstGeom prst="rect">
             <a:avLst/>
           </a:prstGeom>
           <a:solidFill>
-            <a:srgbClr val="E9EDF2"/>
+            <a:srgbClr val="FFF6D6"/>
           </a:solidFill>
           <a:ln>
             <a:noFill/>
@@ -7837,137 +6936,20 @@
       </p:sp>
       <p:sp>
         <p:nvSpPr>
-          <p:cNvPr id="5" name="TextBox 4"/>
-          <p:cNvSpPr txBox="1"/>
+          <p:cNvPr id="6" name="Rectangle 5"/>
+          <p:cNvSpPr/>
           <p:nvPr/>
         </p:nvSpPr>
         <p:spPr>
           <a:xfrm>
-            <a:off x="548640" y="2397556"/>
-            <a:ext cx="2697480" cy="1113739"/>
+            <a:off x="548640" y="5440680"/>
+            <a:ext cx="118872" cy="960120"/>
           </a:xfrm>
           <a:prstGeom prst="rect">
             <a:avLst/>
           </a:prstGeom>
-          <a:noFill/>
-        </p:spPr>
-        <p:txBody>
-          <a:bodyPr wrap="square" anchor="ctr">
-            <a:spAutoFit/>
-          </a:bodyPr>
-          <a:lstStyle/>
-          <a:p>
-            <a:pPr algn="ctr">
-              <a:lnSpc>
-                <a:spcPct val="100000"/>
-              </a:lnSpc>
-            </a:pPr>
-            <a:r>
-              <a:rPr sz="4600" b="1" i="0">
-                <a:solidFill>
-                  <a:srgbClr val="1A1A1A"/>
-                </a:solidFill>
-                <a:latin typeface="Arial"/>
-              </a:rPr>
-              <a:t>0.3254</a:t>
-            </a:r>
-          </a:p>
-        </p:txBody>
-      </p:sp>
-      <p:sp>
-        <p:nvSpPr>
-          <p:cNvPr id="6" name="TextBox 5"/>
-          <p:cNvSpPr txBox="1"/>
-          <p:nvPr/>
-        </p:nvSpPr>
-        <p:spPr>
-          <a:xfrm>
-            <a:off x="548640" y="3378708"/>
-            <a:ext cx="2697480" cy="583387"/>
-          </a:xfrm>
-          <a:prstGeom prst="rect">
-            <a:avLst/>
-          </a:prstGeom>
-          <a:noFill/>
-        </p:spPr>
-        <p:txBody>
-          <a:bodyPr wrap="square" anchor="t">
-            <a:spAutoFit/>
-          </a:bodyPr>
-          <a:lstStyle/>
-          <a:p>
-            <a:pPr algn="ctr">
-              <a:lnSpc>
-                <a:spcPct val="100000"/>
-              </a:lnSpc>
-            </a:pPr>
-            <a:r>
-              <a:rPr sz="1700" b="1" i="0">
-                <a:solidFill>
-                  <a:srgbClr val="1A1A1A"/>
-                </a:solidFill>
-                <a:latin typeface="Arial"/>
-              </a:rPr>
-              <a:t>no KD</a:t>
-            </a:r>
-          </a:p>
-        </p:txBody>
-      </p:sp>
-      <p:sp>
-        <p:nvSpPr>
-          <p:cNvPr id="7" name="TextBox 6"/>
-          <p:cNvSpPr txBox="1"/>
-          <p:nvPr/>
-        </p:nvSpPr>
-        <p:spPr>
-          <a:xfrm>
-            <a:off x="548640" y="3935577"/>
-            <a:ext cx="2697480" cy="530352"/>
-          </a:xfrm>
-          <a:prstGeom prst="rect">
-            <a:avLst/>
-          </a:prstGeom>
-          <a:noFill/>
-        </p:spPr>
-        <p:txBody>
-          <a:bodyPr wrap="square" anchor="t">
-            <a:spAutoFit/>
-          </a:bodyPr>
-          <a:lstStyle/>
-          <a:p>
-            <a:pPr algn="ctr">
-              <a:lnSpc>
-                <a:spcPct val="100000"/>
-              </a:lnSpc>
-            </a:pPr>
-            <a:r>
-              <a:rPr sz="1250" b="0" i="1">
-                <a:solidFill>
-                  <a:srgbClr val="6B7280"/>
-                </a:solidFill>
-                <a:latin typeface="Arial"/>
-              </a:rPr>
-              <a:t>baseline</a:t>
-            </a:r>
-          </a:p>
-        </p:txBody>
-      </p:sp>
-      <p:sp>
-        <p:nvSpPr>
-          <p:cNvPr id="8" name="Rounded Rectangle 7"/>
-          <p:cNvSpPr/>
-          <p:nvPr/>
-        </p:nvSpPr>
-        <p:spPr>
-          <a:xfrm>
-            <a:off x="3374136" y="1920240"/>
-            <a:ext cx="2697480" cy="2651760"/>
-          </a:xfrm>
-          <a:prstGeom prst="roundRect">
-            <a:avLst/>
-          </a:prstGeom>
           <a:solidFill>
-            <a:srgbClr val="E7DEF5"/>
+            <a:srgbClr val="F0A500"/>
           </a:solidFill>
           <a:ln>
             <a:noFill/>
@@ -7998,14 +6980,14 @@
       </p:sp>
       <p:sp>
         <p:nvSpPr>
-          <p:cNvPr id="9" name="TextBox 8"/>
+          <p:cNvPr id="7" name="TextBox 6"/>
           <p:cNvSpPr txBox="1"/>
           <p:nvPr/>
         </p:nvSpPr>
         <p:spPr>
           <a:xfrm>
-            <a:off x="3374136" y="2397556"/>
-            <a:ext cx="2697480" cy="1113739"/>
+            <a:off x="868680" y="5559552"/>
+            <a:ext cx="10607040" cy="320040"/>
           </a:xfrm>
           <a:prstGeom prst="rect">
             <a:avLst/>
@@ -8013,38 +6995,38 @@
           <a:noFill/>
         </p:spPr>
         <p:txBody>
-          <a:bodyPr wrap="square" anchor="ctr">
+          <a:bodyPr wrap="square" anchor="t">
             <a:spAutoFit/>
           </a:bodyPr>
           <a:lstStyle/>
           <a:p>
-            <a:pPr algn="ctr">
+            <a:pPr algn="l">
               <a:lnSpc>
                 <a:spcPct val="100000"/>
               </a:lnSpc>
             </a:pPr>
             <a:r>
-              <a:rPr sz="4600" b="1" i="0">
-                <a:solidFill>
-                  <a:srgbClr val="6B3FC4"/>
-                </a:solidFill>
-                <a:latin typeface="Arial"/>
-              </a:rPr>
-              <a:t>0.3764</a:t>
-            </a:r>
-          </a:p>
-        </p:txBody>
-      </p:sp>
-      <p:sp>
-        <p:nvSpPr>
-          <p:cNvPr id="10" name="TextBox 9"/>
+              <a:rPr sz="1500" b="1" i="0">
+                <a:solidFill>
+                  <a:srgbClr val="E08600"/>
+                </a:solidFill>
+                <a:latin typeface="Arial"/>
+              </a:rPr>
+              <a:t>Conclusion</a:t>
+            </a:r>
+          </a:p>
+        </p:txBody>
+      </p:sp>
+      <p:sp>
+        <p:nvSpPr>
+          <p:cNvPr id="8" name="TextBox 7"/>
           <p:cNvSpPr txBox="1"/>
           <p:nvPr/>
         </p:nvSpPr>
         <p:spPr>
           <a:xfrm>
-            <a:off x="3374136" y="3378708"/>
-            <a:ext cx="2697480" cy="583387"/>
+            <a:off x="868680" y="5879592"/>
+            <a:ext cx="10607040" cy="457200"/>
           </a:xfrm>
           <a:prstGeom prst="rect">
             <a:avLst/>
@@ -8057,553 +7039,26 @@
           </a:bodyPr>
           <a:lstStyle/>
           <a:p>
-            <a:pPr algn="ctr">
+            <a:pPr algn="l">
               <a:lnSpc>
                 <a:spcPct val="100000"/>
               </a:lnSpc>
             </a:pPr>
             <a:r>
-              <a:rPr sz="1700" b="1" i="0">
+              <a:rPr sz="1800" b="1" i="0">
                 <a:solidFill>
                   <a:srgbClr val="1A1A1A"/>
                 </a:solidFill>
                 <a:latin typeface="Arial"/>
               </a:rPr>
-              <a:t>Gemma-31B</a:t>
-            </a:r>
-          </a:p>
-        </p:txBody>
-      </p:sp>
-      <p:sp>
-        <p:nvSpPr>
-          <p:cNvPr id="11" name="TextBox 10"/>
-          <p:cNvSpPr txBox="1"/>
-          <p:nvPr/>
-        </p:nvSpPr>
-        <p:spPr>
-          <a:xfrm>
-            <a:off x="3374136" y="3935577"/>
-            <a:ext cx="2697480" cy="530352"/>
-          </a:xfrm>
-          <a:prstGeom prst="rect">
-            <a:avLst/>
-          </a:prstGeom>
-          <a:noFill/>
-        </p:spPr>
-        <p:txBody>
-          <a:bodyPr wrap="square" anchor="t">
-            <a:spAutoFit/>
-          </a:bodyPr>
-          <a:lstStyle/>
-          <a:p>
-            <a:pPr algn="ctr">
-              <a:lnSpc>
-                <a:spcPct val="100000"/>
-              </a:lnSpc>
-            </a:pPr>
-            <a:r>
-              <a:rPr sz="1250" b="0" i="1">
-                <a:solidFill>
-                  <a:srgbClr val="6B7280"/>
-                </a:solidFill>
-                <a:latin typeface="Arial"/>
-              </a:rPr>
-              <a:t>local</a:t>
-            </a:r>
-          </a:p>
-        </p:txBody>
-      </p:sp>
-      <p:sp>
-        <p:nvSpPr>
-          <p:cNvPr id="12" name="Rounded Rectangle 11"/>
-          <p:cNvSpPr/>
-          <p:nvPr/>
-        </p:nvSpPr>
-        <p:spPr>
-          <a:xfrm>
-            <a:off x="6199632" y="1920240"/>
-            <a:ext cx="2697480" cy="2651760"/>
-          </a:xfrm>
-          <a:prstGeom prst="roundRect">
-            <a:avLst/>
-          </a:prstGeom>
-          <a:solidFill>
-            <a:srgbClr val="DCE6F5"/>
-          </a:solidFill>
-          <a:ln>
-            <a:noFill/>
-          </a:ln>
-          <a:effectLst/>
-        </p:spPr>
-        <p:style>
-          <a:lnRef idx="1">
-            <a:schemeClr val="accent1"/>
-          </a:lnRef>
-          <a:fillRef idx="3">
-            <a:schemeClr val="accent1"/>
-          </a:fillRef>
-          <a:effectRef idx="2">
-            <a:schemeClr val="accent1"/>
-          </a:effectRef>
-          <a:fontRef idx="minor">
-            <a:schemeClr val="lt1"/>
-          </a:fontRef>
-        </p:style>
-        <p:txBody>
-          <a:bodyPr rtlCol="0" anchor="ctr"/>
-          <a:lstStyle/>
-          <a:p>
-            <a:pPr algn="ctr"/>
-          </a:p>
-        </p:txBody>
-      </p:sp>
-      <p:sp>
-        <p:nvSpPr>
-          <p:cNvPr id="13" name="TextBox 12"/>
-          <p:cNvSpPr txBox="1"/>
-          <p:nvPr/>
-        </p:nvSpPr>
-        <p:spPr>
-          <a:xfrm>
-            <a:off x="6199632" y="2397556"/>
-            <a:ext cx="2697480" cy="1113739"/>
-          </a:xfrm>
-          <a:prstGeom prst="rect">
-            <a:avLst/>
-          </a:prstGeom>
-          <a:noFill/>
-        </p:spPr>
-        <p:txBody>
-          <a:bodyPr wrap="square" anchor="ctr">
-            <a:spAutoFit/>
-          </a:bodyPr>
-          <a:lstStyle/>
-          <a:p>
-            <a:pPr algn="ctr">
-              <a:lnSpc>
-                <a:spcPct val="100000"/>
-              </a:lnSpc>
-            </a:pPr>
-            <a:r>
-              <a:rPr sz="4600" b="1" i="0">
-                <a:solidFill>
-                  <a:srgbClr val="2E75B6"/>
-                </a:solidFill>
-                <a:latin typeface="Arial"/>
-              </a:rPr>
-              <a:t>0.4094</a:t>
-            </a:r>
-          </a:p>
-        </p:txBody>
-      </p:sp>
-      <p:sp>
-        <p:nvSpPr>
-          <p:cNvPr id="14" name="TextBox 13"/>
-          <p:cNvSpPr txBox="1"/>
-          <p:nvPr/>
-        </p:nvSpPr>
-        <p:spPr>
-          <a:xfrm>
-            <a:off x="6199632" y="3378708"/>
-            <a:ext cx="2697480" cy="583387"/>
-          </a:xfrm>
-          <a:prstGeom prst="rect">
-            <a:avLst/>
-          </a:prstGeom>
-          <a:noFill/>
-        </p:spPr>
-        <p:txBody>
-          <a:bodyPr wrap="square" anchor="t">
-            <a:spAutoFit/>
-          </a:bodyPr>
-          <a:lstStyle/>
-          <a:p>
-            <a:pPr algn="ctr">
-              <a:lnSpc>
-                <a:spcPct val="100000"/>
-              </a:lnSpc>
-            </a:pPr>
-            <a:r>
-              <a:rPr sz="1700" b="1" i="0">
-                <a:solidFill>
-                  <a:srgbClr val="1A1A1A"/>
-                </a:solidFill>
-                <a:latin typeface="Arial"/>
-              </a:rPr>
-              <a:t>Qwen-36B</a:t>
-            </a:r>
-          </a:p>
-        </p:txBody>
-      </p:sp>
-      <p:sp>
-        <p:nvSpPr>
-          <p:cNvPr id="15" name="TextBox 14"/>
-          <p:cNvSpPr txBox="1"/>
-          <p:nvPr/>
-        </p:nvSpPr>
-        <p:spPr>
-          <a:xfrm>
-            <a:off x="6199632" y="3935577"/>
-            <a:ext cx="2697480" cy="530352"/>
-          </a:xfrm>
-          <a:prstGeom prst="rect">
-            <a:avLst/>
-          </a:prstGeom>
-          <a:noFill/>
-        </p:spPr>
-        <p:txBody>
-          <a:bodyPr wrap="square" anchor="t">
-            <a:spAutoFit/>
-          </a:bodyPr>
-          <a:lstStyle/>
-          <a:p>
-            <a:pPr algn="ctr">
-              <a:lnSpc>
-                <a:spcPct val="100000"/>
-              </a:lnSpc>
-            </a:pPr>
-            <a:r>
-              <a:rPr sz="1250" b="0" i="1">
-                <a:solidFill>
-                  <a:srgbClr val="6B7280"/>
-                </a:solidFill>
-                <a:latin typeface="Arial"/>
-              </a:rPr>
-              <a:t>local</a:t>
-            </a:r>
-          </a:p>
-        </p:txBody>
-      </p:sp>
-      <p:sp>
-        <p:nvSpPr>
-          <p:cNvPr id="16" name="Rounded Rectangle 15"/>
-          <p:cNvSpPr/>
-          <p:nvPr/>
-        </p:nvSpPr>
-        <p:spPr>
-          <a:xfrm>
-            <a:off x="9025128" y="1920240"/>
-            <a:ext cx="2615184" cy="2651760"/>
-          </a:xfrm>
-          <a:prstGeom prst="roundRect">
-            <a:avLst/>
-          </a:prstGeom>
-          <a:solidFill>
-            <a:srgbClr val="DDF0E4"/>
-          </a:solidFill>
-          <a:ln>
-            <a:noFill/>
-          </a:ln>
-          <a:effectLst/>
-        </p:spPr>
-        <p:style>
-          <a:lnRef idx="1">
-            <a:schemeClr val="accent1"/>
-          </a:lnRef>
-          <a:fillRef idx="3">
-            <a:schemeClr val="accent1"/>
-          </a:fillRef>
-          <a:effectRef idx="2">
-            <a:schemeClr val="accent1"/>
-          </a:effectRef>
-          <a:fontRef idx="minor">
-            <a:schemeClr val="lt1"/>
-          </a:fontRef>
-        </p:style>
-        <p:txBody>
-          <a:bodyPr rtlCol="0" anchor="ctr"/>
-          <a:lstStyle/>
-          <a:p>
-            <a:pPr algn="ctr"/>
-          </a:p>
-        </p:txBody>
-      </p:sp>
-      <p:sp>
-        <p:nvSpPr>
-          <p:cNvPr id="17" name="TextBox 16"/>
-          <p:cNvSpPr txBox="1"/>
-          <p:nvPr/>
-        </p:nvSpPr>
-        <p:spPr>
-          <a:xfrm>
-            <a:off x="9025128" y="2397556"/>
-            <a:ext cx="2615184" cy="1113739"/>
-          </a:xfrm>
-          <a:prstGeom prst="rect">
-            <a:avLst/>
-          </a:prstGeom>
-          <a:noFill/>
-        </p:spPr>
-        <p:txBody>
-          <a:bodyPr wrap="square" anchor="ctr">
-            <a:spAutoFit/>
-          </a:bodyPr>
-          <a:lstStyle/>
-          <a:p>
-            <a:pPr algn="ctr">
-              <a:lnSpc>
-                <a:spcPct val="100000"/>
-              </a:lnSpc>
-            </a:pPr>
-            <a:r>
-              <a:rPr sz="4600" b="1" i="0">
-                <a:solidFill>
-                  <a:srgbClr val="2E8B57"/>
-                </a:solidFill>
-                <a:latin typeface="Arial"/>
-              </a:rPr>
-              <a:t>0.4141</a:t>
-            </a:r>
-          </a:p>
-        </p:txBody>
-      </p:sp>
-      <p:sp>
-        <p:nvSpPr>
-          <p:cNvPr id="18" name="TextBox 17"/>
-          <p:cNvSpPr txBox="1"/>
-          <p:nvPr/>
-        </p:nvSpPr>
-        <p:spPr>
-          <a:xfrm>
-            <a:off x="9025128" y="3378708"/>
-            <a:ext cx="2615184" cy="583387"/>
-          </a:xfrm>
-          <a:prstGeom prst="rect">
-            <a:avLst/>
-          </a:prstGeom>
-          <a:noFill/>
-        </p:spPr>
-        <p:txBody>
-          <a:bodyPr wrap="square" anchor="t">
-            <a:spAutoFit/>
-          </a:bodyPr>
-          <a:lstStyle/>
-          <a:p>
-            <a:pPr algn="ctr">
-              <a:lnSpc>
-                <a:spcPct val="100000"/>
-              </a:lnSpc>
-            </a:pPr>
-            <a:r>
-              <a:rPr sz="1700" b="1" i="0">
-                <a:solidFill>
-                  <a:srgbClr val="1A1A1A"/>
-                </a:solidFill>
-                <a:latin typeface="Arial"/>
-              </a:rPr>
-              <a:t>DeepSeek</a:t>
-            </a:r>
-          </a:p>
-        </p:txBody>
-      </p:sp>
-      <p:sp>
-        <p:nvSpPr>
-          <p:cNvPr id="19" name="TextBox 18"/>
-          <p:cNvSpPr txBox="1"/>
-          <p:nvPr/>
-        </p:nvSpPr>
-        <p:spPr>
-          <a:xfrm>
-            <a:off x="9025128" y="3935577"/>
-            <a:ext cx="2615184" cy="530352"/>
-          </a:xfrm>
-          <a:prstGeom prst="rect">
-            <a:avLst/>
-          </a:prstGeom>
-          <a:noFill/>
-        </p:spPr>
-        <p:txBody>
-          <a:bodyPr wrap="square" anchor="t">
-            <a:spAutoFit/>
-          </a:bodyPr>
-          <a:lstStyle/>
-          <a:p>
-            <a:pPr algn="ctr">
-              <a:lnSpc>
-                <a:spcPct val="100000"/>
-              </a:lnSpc>
-            </a:pPr>
-            <a:r>
-              <a:rPr sz="1250" b="0" i="1">
-                <a:solidFill>
-                  <a:srgbClr val="6B7280"/>
-                </a:solidFill>
-                <a:latin typeface="Arial"/>
-              </a:rPr>
-              <a:t>cloud</a:t>
-            </a:r>
-          </a:p>
-        </p:txBody>
-      </p:sp>
-      <p:sp>
-        <p:nvSpPr>
-          <p:cNvPr id="20" name="Rectangle 19"/>
-          <p:cNvSpPr/>
-          <p:nvPr/>
-        </p:nvSpPr>
-        <p:spPr>
-          <a:xfrm>
-            <a:off x="548640" y="5486400"/>
-            <a:ext cx="11091672" cy="914400"/>
-          </a:xfrm>
-          <a:prstGeom prst="rect">
-            <a:avLst/>
-          </a:prstGeom>
-          <a:solidFill>
-            <a:srgbClr val="FFF6D6"/>
-          </a:solidFill>
-          <a:ln>
-            <a:noFill/>
-          </a:ln>
-          <a:effectLst/>
-        </p:spPr>
-        <p:style>
-          <a:lnRef idx="1">
-            <a:schemeClr val="accent1"/>
-          </a:lnRef>
-          <a:fillRef idx="3">
-            <a:schemeClr val="accent1"/>
-          </a:fillRef>
-          <a:effectRef idx="2">
-            <a:schemeClr val="accent1"/>
-          </a:effectRef>
-          <a:fontRef idx="minor">
-            <a:schemeClr val="lt1"/>
-          </a:fontRef>
-        </p:style>
-        <p:txBody>
-          <a:bodyPr rtlCol="0" anchor="ctr"/>
-          <a:lstStyle/>
-          <a:p>
-            <a:pPr algn="ctr"/>
-          </a:p>
-        </p:txBody>
-      </p:sp>
-      <p:sp>
-        <p:nvSpPr>
-          <p:cNvPr id="21" name="Rectangle 20"/>
-          <p:cNvSpPr/>
-          <p:nvPr/>
-        </p:nvSpPr>
-        <p:spPr>
-          <a:xfrm>
-            <a:off x="548640" y="5486400"/>
-            <a:ext cx="118872" cy="914400"/>
-          </a:xfrm>
-          <a:prstGeom prst="rect">
-            <a:avLst/>
-          </a:prstGeom>
-          <a:solidFill>
-            <a:srgbClr val="F0A500"/>
-          </a:solidFill>
-          <a:ln>
-            <a:noFill/>
-          </a:ln>
-          <a:effectLst/>
-        </p:spPr>
-        <p:style>
-          <a:lnRef idx="1">
-            <a:schemeClr val="accent1"/>
-          </a:lnRef>
-          <a:fillRef idx="3">
-            <a:schemeClr val="accent1"/>
-          </a:fillRef>
-          <a:effectRef idx="2">
-            <a:schemeClr val="accent1"/>
-          </a:effectRef>
-          <a:fontRef idx="minor">
-            <a:schemeClr val="lt1"/>
-          </a:fontRef>
-        </p:style>
-        <p:txBody>
-          <a:bodyPr rtlCol="0" anchor="ctr"/>
-          <a:lstStyle/>
-          <a:p>
-            <a:pPr algn="ctr"/>
-          </a:p>
-        </p:txBody>
-      </p:sp>
-      <p:sp>
-        <p:nvSpPr>
-          <p:cNvPr id="22" name="TextBox 21"/>
-          <p:cNvSpPr txBox="1"/>
-          <p:nvPr/>
-        </p:nvSpPr>
-        <p:spPr>
-          <a:xfrm>
-            <a:off x="868680" y="5596128"/>
-            <a:ext cx="10607040" cy="320040"/>
-          </a:xfrm>
-          <a:prstGeom prst="rect">
-            <a:avLst/>
-          </a:prstGeom>
-          <a:noFill/>
-        </p:spPr>
-        <p:txBody>
-          <a:bodyPr wrap="square" anchor="t">
-            <a:spAutoFit/>
-          </a:bodyPr>
-          <a:lstStyle/>
-          <a:p>
-            <a:pPr algn="l">
-              <a:lnSpc>
-                <a:spcPct val="100000"/>
-              </a:lnSpc>
-            </a:pPr>
-            <a:r>
-              <a:rPr sz="1500" b="1" i="0">
-                <a:solidFill>
-                  <a:srgbClr val="E08600"/>
-                </a:solidFill>
-                <a:latin typeface="Arial"/>
-              </a:rPr>
-              <a:t>Takeaway</a:t>
-            </a:r>
-          </a:p>
-        </p:txBody>
-      </p:sp>
-      <p:sp>
-        <p:nvSpPr>
-          <p:cNvPr id="23" name="TextBox 22"/>
-          <p:cNvSpPr txBox="1"/>
-          <p:nvPr/>
-        </p:nvSpPr>
-        <p:spPr>
-          <a:xfrm>
-            <a:off x="868680" y="5907024"/>
-            <a:ext cx="10607040" cy="457200"/>
-          </a:xfrm>
-          <a:prstGeom prst="rect">
-            <a:avLst/>
-          </a:prstGeom>
-          <a:noFill/>
-        </p:spPr>
-        <p:txBody>
-          <a:bodyPr wrap="square" anchor="t">
-            <a:spAutoFit/>
-          </a:bodyPr>
-          <a:lstStyle/>
-          <a:p>
-            <a:pPr algn="l">
-              <a:lnSpc>
-                <a:spcPct val="100000"/>
-              </a:lnSpc>
-            </a:pPr>
-            <a:r>
-              <a:rPr sz="1800" b="1" i="0">
-                <a:solidFill>
-                  <a:srgbClr val="1A1A1A"/>
-                </a:solidFill>
-                <a:latin typeface="Arial"/>
-              </a:rPr>
-              <a:t>Local Qwen recovers 95% of the cloud gain. Across 4 languages avg gap ≈ −2.5 pp; on Tatar Qwen even wins.</a:t>
-            </a:r>
-          </a:p>
-        </p:txBody>
-      </p:sp>
-      <p:sp>
-        <p:nvSpPr>
-          <p:cNvPr id="24" name="TextBox 23"/>
+              <a:t>A strong local open model replaces the paid cloud API — no systematic loss.</a:t>
+            </a:r>
+          </a:p>
+        </p:txBody>
+      </p:sp>
+      <p:sp>
+        <p:nvSpPr>
+          <p:cNvPr id="9" name="TextBox 8"/>
           <p:cNvSpPr txBox="1"/>
           <p:nvPr/>
         </p:nvSpPr>
@@ -8706,7 +7161,7 @@
         <p:spPr>
           <a:xfrm>
             <a:off x="548640" y="777240"/>
-            <a:ext cx="11064240" cy="1005840"/>
+            <a:ext cx="11064240" cy="960120"/>
           </a:xfrm>
           <a:prstGeom prst="rect">
             <a:avLst/>
@@ -8725,7 +7180,7 @@
               </a:lnSpc>
             </a:pPr>
             <a:r>
-              <a:rPr sz="3300" b="1" i="0">
+              <a:rPr sz="3200" b="1" i="0">
                 <a:solidFill>
                   <a:srgbClr val="1A1A1A"/>
                 </a:solidFill>
@@ -8744,8 +7199,8 @@
         </p:nvSpPr>
         <p:spPr>
           <a:xfrm>
-            <a:off x="548640" y="1920240"/>
-            <a:ext cx="5440680" cy="3108960"/>
+            <a:off x="548640" y="1874519"/>
+            <a:ext cx="5440680" cy="3200400"/>
           </a:xfrm>
           <a:prstGeom prst="roundRect">
             <a:avLst/>
@@ -8788,7 +7243,7 @@
         </p:nvSpPr>
         <p:spPr>
           <a:xfrm>
-            <a:off x="822960" y="2148840"/>
+            <a:off x="868680" y="2103120"/>
             <a:ext cx="4937760" cy="457200"/>
           </a:xfrm>
           <a:prstGeom prst="rect">
@@ -8808,7 +7263,7 @@
               </a:lnSpc>
             </a:pPr>
             <a:r>
-              <a:rPr sz="2000" b="1" i="0">
+              <a:rPr sz="2200" b="1" i="0">
                 <a:solidFill>
                   <a:srgbClr val="2E8B57"/>
                 </a:solidFill>
@@ -8827,8 +7282,8 @@
         </p:nvSpPr>
         <p:spPr>
           <a:xfrm>
-            <a:off x="822960" y="2743200"/>
-            <a:ext cx="4937760" cy="2103120"/>
+            <a:off x="868680" y="2743200"/>
+            <a:ext cx="4892040" cy="2194560"/>
           </a:xfrm>
           <a:prstGeom prst="rect">
             <a:avLst/>
@@ -8843,9 +7298,18 @@
           <a:p>
             <a:pPr algn="l">
               <a:lnSpc>
-                <a:spcPct val="130000"/>
-              </a:lnSpc>
-            </a:pPr>
+                <a:spcPct val="150000"/>
+              </a:lnSpc>
+            </a:pPr>
+            <a:r>
+              <a:rPr sz="1700" b="1" i="0">
+                <a:solidFill>
+                  <a:srgbClr val="2E8B57"/>
+                </a:solidFill>
+                <a:latin typeface="Arial"/>
+              </a:rPr>
+              <a:t>▪  </a:t>
+            </a:r>
             <a:r>
               <a:rPr sz="1700" b="0" i="0">
                 <a:solidFill>
@@ -8853,15 +7317,27 @@
                 </a:solidFill>
                 <a:latin typeface="Arial"/>
               </a:rPr>
-              <a:t>• Gold weak or classes very sparse</a:t>
+              <a:t>gold weak / classes very sparse</a:t>
             </a:r>
           </a:p>
           <a:p>
             <a:pPr algn="l">
               <a:lnSpc>
-                <a:spcPct val="130000"/>
-              </a:lnSpc>
-            </a:pPr>
+                <a:spcPct val="150000"/>
+              </a:lnSpc>
+              <a:spcBef>
+                <a:spcPts val="0"/>
+              </a:spcBef>
+            </a:pPr>
+            <a:r>
+              <a:rPr sz="1700" b="1" i="0">
+                <a:solidFill>
+                  <a:srgbClr val="2E8B57"/>
+                </a:solidFill>
+                <a:latin typeface="Arial"/>
+              </a:rPr>
+              <a:t>▪  </a:t>
+            </a:r>
             <a:r>
               <a:rPr sz="1700" b="0" i="0">
                 <a:solidFill>
@@ -8869,15 +7345,27 @@
                 </a:solidFill>
                 <a:latin typeface="Arial"/>
               </a:rPr>
-              <a:t>• Silver stays a minority (≈0.8x gold)</a:t>
+              <a:t>silver stays a minority (≈0.8× gold)</a:t>
             </a:r>
           </a:p>
           <a:p>
             <a:pPr algn="l">
               <a:lnSpc>
-                <a:spcPct val="130000"/>
-              </a:lnSpc>
-            </a:pPr>
+                <a:spcPct val="150000"/>
+              </a:lnSpc>
+              <a:spcBef>
+                <a:spcPts val="0"/>
+              </a:spcBef>
+            </a:pPr>
+            <a:r>
+              <a:rPr sz="1700" b="1" i="0">
+                <a:solidFill>
+                  <a:srgbClr val="2E8B57"/>
+                </a:solidFill>
+                <a:latin typeface="Arial"/>
+              </a:rPr>
+              <a:t>▪  </a:t>
+            </a:r>
             <a:r>
               <a:rPr sz="1700" b="0" i="0">
                 <a:solidFill>
@@ -8885,7 +7373,7 @@
                 </a:solidFill>
                 <a:latin typeface="Arial"/>
               </a:rPr>
-              <a:t>• adds class priors / seed diversity</a:t>
+              <a:t>adds class priors &amp; seed diversity</a:t>
             </a:r>
           </a:p>
         </p:txBody>
@@ -8898,8 +7386,8 @@
         </p:nvSpPr>
         <p:spPr>
           <a:xfrm>
-            <a:off x="6199632" y="1920240"/>
-            <a:ext cx="5440680" cy="3108960"/>
+            <a:off x="6199632" y="1874519"/>
+            <a:ext cx="5440680" cy="3200400"/>
           </a:xfrm>
           <a:prstGeom prst="roundRect">
             <a:avLst/>
@@ -8942,7 +7430,7 @@
         </p:nvSpPr>
         <p:spPr>
           <a:xfrm>
-            <a:off x="6473952" y="2148840"/>
+            <a:off x="6519672" y="2103120"/>
             <a:ext cx="4937760" cy="457200"/>
           </a:xfrm>
           <a:prstGeom prst="rect">
@@ -8962,7 +7450,7 @@
               </a:lnSpc>
             </a:pPr>
             <a:r>
-              <a:rPr sz="2000" b="1" i="0">
+              <a:rPr sz="2200" b="1" i="0">
                 <a:solidFill>
                   <a:srgbClr val="C0392B"/>
                 </a:solidFill>
@@ -8981,8 +7469,8 @@
         </p:nvSpPr>
         <p:spPr>
           <a:xfrm>
-            <a:off x="6473952" y="2743200"/>
-            <a:ext cx="4937760" cy="2103120"/>
+            <a:off x="6519672" y="2743200"/>
+            <a:ext cx="4892040" cy="2194560"/>
           </a:xfrm>
           <a:prstGeom prst="rect">
             <a:avLst/>
@@ -8997,9 +7485,18 @@
           <a:p>
             <a:pPr algn="l">
               <a:lnSpc>
-                <a:spcPct val="130000"/>
-              </a:lnSpc>
-            </a:pPr>
+                <a:spcPct val="150000"/>
+              </a:lnSpc>
+            </a:pPr>
+            <a:r>
+              <a:rPr sz="1700" b="1" i="0">
+                <a:solidFill>
+                  <a:srgbClr val="C0392B"/>
+                </a:solidFill>
+                <a:latin typeface="Arial"/>
+              </a:rPr>
+              <a:t>▪  </a:t>
+            </a:r>
             <a:r>
               <a:rPr sz="1700" b="0" i="0">
                 <a:solidFill>
@@ -9007,15 +7504,27 @@
                 </a:solidFill>
                 <a:latin typeface="Arial"/>
               </a:rPr>
-              <a:t>• Strong baseline, already saturated</a:t>
+              <a:t>baseline already strong / saturated</a:t>
             </a:r>
           </a:p>
           <a:p>
             <a:pPr algn="l">
               <a:lnSpc>
-                <a:spcPct val="130000"/>
-              </a:lnSpc>
-            </a:pPr>
+                <a:spcPct val="150000"/>
+              </a:lnSpc>
+              <a:spcBef>
+                <a:spcPts val="0"/>
+              </a:spcBef>
+            </a:pPr>
+            <a:r>
+              <a:rPr sz="1700" b="1" i="0">
+                <a:solidFill>
+                  <a:srgbClr val="C0392B"/>
+                </a:solidFill>
+                <a:latin typeface="Arial"/>
+              </a:rPr>
+              <a:t>▪  </a:t>
+            </a:r>
             <a:r>
               <a:rPr sz="1700" b="0" i="0">
                 <a:solidFill>
@@ -9023,15 +7532,27 @@
                 </a:solidFill>
                 <a:latin typeface="Arial"/>
               </a:rPr>
-              <a:t>• Strong gold drowned by 2x silver</a:t>
+              <a:t>strong gold drowned by 2× silver</a:t>
             </a:r>
           </a:p>
           <a:p>
             <a:pPr algn="l">
               <a:lnSpc>
-                <a:spcPct val="130000"/>
-              </a:lnSpc>
-            </a:pPr>
+                <a:spcPct val="150000"/>
+              </a:lnSpc>
+              <a:spcBef>
+                <a:spcPts val="0"/>
+              </a:spcBef>
+            </a:pPr>
+            <a:r>
+              <a:rPr sz="1700" b="1" i="0">
+                <a:solidFill>
+                  <a:srgbClr val="C0392B"/>
+                </a:solidFill>
+                <a:latin typeface="Arial"/>
+              </a:rPr>
+              <a:t>▪  </a:t>
+            </a:r>
             <a:r>
               <a:rPr sz="1700" b="0" i="0">
                 <a:solidFill>
@@ -9039,7 +7560,7 @@
                 </a:solidFill>
                 <a:latin typeface="Arial"/>
               </a:rPr>
-              <a:t>• silver adds only noise</a:t>
+              <a:t>silver adds only noise</a:t>
             </a:r>
           </a:p>
         </p:txBody>
@@ -9052,8 +7573,8 @@
         </p:nvSpPr>
         <p:spPr>
           <a:xfrm>
-            <a:off x="548640" y="5486400"/>
-            <a:ext cx="11091672" cy="914400"/>
+            <a:off x="548640" y="5257800"/>
+            <a:ext cx="11091672" cy="960120"/>
           </a:xfrm>
           <a:prstGeom prst="rect">
             <a:avLst/>
@@ -9096,8 +7617,8 @@
         </p:nvSpPr>
         <p:spPr>
           <a:xfrm>
-            <a:off x="548640" y="5486400"/>
-            <a:ext cx="118872" cy="914400"/>
+            <a:off x="548640" y="5257800"/>
+            <a:ext cx="118872" cy="960120"/>
           </a:xfrm>
           <a:prstGeom prst="rect">
             <a:avLst/>
@@ -9140,7 +7661,7 @@
         </p:nvSpPr>
         <p:spPr>
           <a:xfrm>
-            <a:off x="868680" y="5596128"/>
+            <a:off x="868680" y="5376672"/>
             <a:ext cx="10607040" cy="320040"/>
           </a:xfrm>
           <a:prstGeom prst="rect">
@@ -9166,7 +7687,7 @@
                 </a:solidFill>
                 <a:latin typeface="Arial"/>
               </a:rPr>
-              <a:t>Takeaway</a:t>
+              <a:t>Conclusion</a:t>
             </a:r>
           </a:p>
         </p:txBody>
@@ -9179,7 +7700,7 @@
         </p:nvSpPr>
         <p:spPr>
           <a:xfrm>
-            <a:off x="868680" y="5907024"/>
+            <a:off x="868680" y="5696712"/>
             <a:ext cx="10607040" cy="457200"/>
           </a:xfrm>
           <a:prstGeom prst="rect">
@@ -9315,7 +7836,7 @@
         <p:spPr>
           <a:xfrm>
             <a:off x="548640" y="777240"/>
-            <a:ext cx="11064240" cy="1005840"/>
+            <a:ext cx="11064240" cy="960120"/>
           </a:xfrm>
           <a:prstGeom prst="rect">
             <a:avLst/>
@@ -9334,33 +7855,164 @@
               </a:lnSpc>
             </a:pPr>
             <a:r>
-              <a:rPr sz="3300" b="1" i="0">
+              <a:rPr sz="3200" b="1" i="0">
                 <a:solidFill>
                   <a:srgbClr val="1A1A1A"/>
                 </a:solidFill>
                 <a:latin typeface="Arial"/>
               </a:rPr>
-              <a:t>Two practical lessons</a:t>
-            </a:r>
-          </a:p>
-        </p:txBody>
-      </p:sp>
-      <p:sp>
-        <p:nvSpPr>
-          <p:cNvPr id="4" name="Rounded Rectangle 3"/>
+              <a:t>Two engineering lessons</a:t>
+            </a:r>
+          </a:p>
+        </p:txBody>
+      </p:sp>
+      <p:sp>
+        <p:nvSpPr>
+          <p:cNvPr id="4" name="TextBox 3"/>
+          <p:cNvSpPr txBox="1"/>
+          <p:nvPr/>
+        </p:nvSpPr>
+        <p:spPr>
+          <a:xfrm>
+            <a:off x="640080" y="2011680"/>
+            <a:ext cx="10972800" cy="4572000"/>
+          </a:xfrm>
+          <a:prstGeom prst="rect">
+            <a:avLst/>
+          </a:prstGeom>
+          <a:noFill/>
+        </p:spPr>
+        <p:txBody>
+          <a:bodyPr wrap="square" anchor="t">
+            <a:spAutoFit/>
+          </a:bodyPr>
+          <a:lstStyle/>
+          <a:p>
+            <a:pPr algn="l">
+              <a:lnSpc>
+                <a:spcPct val="100000"/>
+              </a:lnSpc>
+              <a:spcAft>
+                <a:spcPts val="810"/>
+              </a:spcAft>
+            </a:pPr>
+            <a:r>
+              <a:rPr sz="2000" b="1" i="0">
+                <a:solidFill>
+                  <a:srgbClr val="2E75B6"/>
+                </a:solidFill>
+                <a:latin typeface="Arial"/>
+              </a:rPr>
+              <a:t>▪  </a:t>
+            </a:r>
+            <a:r>
+              <a:rPr sz="2000" b="1" i="0">
+                <a:solidFill>
+                  <a:srgbClr val="1A1A1A"/>
+                </a:solidFill>
+                <a:latin typeface="Arial"/>
+              </a:rPr>
+              <a:t>Turn off LLM thinking mode:</a:t>
+            </a:r>
+            <a:r>
+              <a:rPr sz="2000" b="0" i="0">
+                <a:solidFill>
+                  <a:srgbClr val="1A1A1A"/>
+                </a:solidFill>
+                <a:latin typeface="Arial"/>
+              </a:rPr>
+              <a:t>  19–29× fewer output tokens, same quality</a:t>
+            </a:r>
+          </a:p>
+          <a:p>
+            <a:pPr algn="l">
+              <a:lnSpc>
+                <a:spcPct val="100000"/>
+              </a:lnSpc>
+              <a:spcBef>
+                <a:spcPts val="0"/>
+              </a:spcBef>
+              <a:spcAft>
+                <a:spcPts val="810"/>
+              </a:spcAft>
+            </a:pPr>
+            <a:r>
+              <a:rPr sz="2000" b="1" i="0">
+                <a:solidFill>
+                  <a:srgbClr val="2E75B6"/>
+                </a:solidFill>
+                <a:latin typeface="Arial"/>
+              </a:rPr>
+              <a:t>▪  </a:t>
+            </a:r>
+            <a:r>
+              <a:rPr sz="2000" b="1" i="0">
+                <a:solidFill>
+                  <a:srgbClr val="1A1A1A"/>
+                </a:solidFill>
+                <a:latin typeface="Arial"/>
+              </a:rPr>
+              <a:t>Silent-failure trap:</a:t>
+            </a:r>
+            <a:r>
+              <a:rPr sz="2000" b="0" i="0">
+                <a:solidFill>
+                  <a:srgbClr val="1A1A1A"/>
+                </a:solidFill>
+                <a:latin typeface="Arial"/>
+              </a:rPr>
+              <a:t>  a 404 made silver empty; training fell back to gold-only</a:t>
+            </a:r>
+          </a:p>
+          <a:p>
+            <a:pPr algn="l">
+              <a:lnSpc>
+                <a:spcPct val="100000"/>
+              </a:lnSpc>
+              <a:spcBef>
+                <a:spcPts val="0"/>
+              </a:spcBef>
+              <a:spcAft>
+                <a:spcPts val="810"/>
+              </a:spcAft>
+            </a:pPr>
+            <a:r>
+              <a:rPr sz="1800" b="0" i="0">
+                <a:solidFill>
+                  <a:srgbClr val="6B7280"/>
+                </a:solidFill>
+                <a:latin typeface="Arial"/>
+              </a:rPr>
+              <a:t>        –  </a:t>
+            </a:r>
+            <a:r>
+              <a:rPr sz="1800" b="0" i="0">
+                <a:solidFill>
+                  <a:srgbClr val="1A1A1A"/>
+                </a:solidFill>
+                <a:latin typeface="Arial"/>
+              </a:rPr>
+              <a:t>fix: pipeline aborts if valid silver quads = 0</a:t>
+            </a:r>
+          </a:p>
+        </p:txBody>
+      </p:sp>
+      <p:sp>
+        <p:nvSpPr>
+          <p:cNvPr id="5" name="Rectangle 4"/>
           <p:cNvSpPr/>
           <p:nvPr/>
         </p:nvSpPr>
         <p:spPr>
           <a:xfrm>
-            <a:off x="548640" y="1920240"/>
-            <a:ext cx="5440680" cy="2834640"/>
-          </a:xfrm>
-          <a:prstGeom prst="roundRect">
+            <a:off x="548640" y="5440680"/>
+            <a:ext cx="11091672" cy="960120"/>
+          </a:xfrm>
+          <a:prstGeom prst="rect">
             <a:avLst/>
           </a:prstGeom>
           <a:solidFill>
-            <a:srgbClr val="DCE6F5"/>
+            <a:srgbClr val="FFF6D6"/>
           </a:solidFill>
           <a:ln>
             <a:noFill/>
@@ -9391,137 +8043,20 @@
       </p:sp>
       <p:sp>
         <p:nvSpPr>
-          <p:cNvPr id="5" name="TextBox 4"/>
-          <p:cNvSpPr txBox="1"/>
+          <p:cNvPr id="6" name="Rectangle 5"/>
+          <p:cNvSpPr/>
           <p:nvPr/>
         </p:nvSpPr>
         <p:spPr>
           <a:xfrm>
-            <a:off x="548640" y="2430475"/>
-            <a:ext cx="5440680" cy="1190548"/>
+            <a:off x="548640" y="5440680"/>
+            <a:ext cx="118872" cy="960120"/>
           </a:xfrm>
           <a:prstGeom prst="rect">
             <a:avLst/>
           </a:prstGeom>
-          <a:noFill/>
-        </p:spPr>
-        <p:txBody>
-          <a:bodyPr wrap="square" anchor="ctr">
-            <a:spAutoFit/>
-          </a:bodyPr>
-          <a:lstStyle/>
-          <a:p>
-            <a:pPr algn="ctr">
-              <a:lnSpc>
-                <a:spcPct val="100000"/>
-              </a:lnSpc>
-            </a:pPr>
-            <a:r>
-              <a:rPr sz="4600" b="1" i="0">
-                <a:solidFill>
-                  <a:srgbClr val="2E75B6"/>
-                </a:solidFill>
-                <a:latin typeface="Arial"/>
-              </a:rPr>
-              <a:t>19–29x</a:t>
-            </a:r>
-          </a:p>
-        </p:txBody>
-      </p:sp>
-      <p:sp>
-        <p:nvSpPr>
-          <p:cNvPr id="6" name="TextBox 5"/>
-          <p:cNvSpPr txBox="1"/>
-          <p:nvPr/>
-        </p:nvSpPr>
-        <p:spPr>
-          <a:xfrm>
-            <a:off x="548640" y="3479292"/>
-            <a:ext cx="5440680" cy="623620"/>
-          </a:xfrm>
-          <a:prstGeom prst="rect">
-            <a:avLst/>
-          </a:prstGeom>
-          <a:noFill/>
-        </p:spPr>
-        <p:txBody>
-          <a:bodyPr wrap="square" anchor="t">
-            <a:spAutoFit/>
-          </a:bodyPr>
-          <a:lstStyle/>
-          <a:p>
-            <a:pPr algn="ctr">
-              <a:lnSpc>
-                <a:spcPct val="100000"/>
-              </a:lnSpc>
-            </a:pPr>
-            <a:r>
-              <a:rPr sz="1700" b="1" i="0">
-                <a:solidFill>
-                  <a:srgbClr val="1A1A1A"/>
-                </a:solidFill>
-                <a:latin typeface="Arial"/>
-              </a:rPr>
-              <a:t>cheaper API</a:t>
-            </a:r>
-          </a:p>
-        </p:txBody>
-      </p:sp>
-      <p:sp>
-        <p:nvSpPr>
-          <p:cNvPr id="7" name="TextBox 6"/>
-          <p:cNvSpPr txBox="1"/>
-          <p:nvPr/>
-        </p:nvSpPr>
-        <p:spPr>
-          <a:xfrm>
-            <a:off x="548640" y="4074566"/>
-            <a:ext cx="5440680" cy="566928"/>
-          </a:xfrm>
-          <a:prstGeom prst="rect">
-            <a:avLst/>
-          </a:prstGeom>
-          <a:noFill/>
-        </p:spPr>
-        <p:txBody>
-          <a:bodyPr wrap="square" anchor="t">
-            <a:spAutoFit/>
-          </a:bodyPr>
-          <a:lstStyle/>
-          <a:p>
-            <a:pPr algn="ctr">
-              <a:lnSpc>
-                <a:spcPct val="100000"/>
-              </a:lnSpc>
-            </a:pPr>
-            <a:r>
-              <a:rPr sz="1250" b="0" i="1">
-                <a:solidFill>
-                  <a:srgbClr val="6B7280"/>
-                </a:solidFill>
-                <a:latin typeface="Arial"/>
-              </a:rPr>
-              <a:t>turn off LLM thinking mode</a:t>
-            </a:r>
-          </a:p>
-        </p:txBody>
-      </p:sp>
-      <p:sp>
-        <p:nvSpPr>
-          <p:cNvPr id="8" name="Rounded Rectangle 7"/>
-          <p:cNvSpPr/>
-          <p:nvPr/>
-        </p:nvSpPr>
-        <p:spPr>
-          <a:xfrm>
-            <a:off x="6199632" y="1920240"/>
-            <a:ext cx="5440680" cy="2834640"/>
-          </a:xfrm>
-          <a:prstGeom prst="roundRect">
-            <a:avLst/>
-          </a:prstGeom>
           <a:solidFill>
-            <a:srgbClr val="FBE3DE"/>
+            <a:srgbClr val="F0A500"/>
           </a:solidFill>
           <a:ln>
             <a:noFill/>
@@ -9552,14 +8087,14 @@
       </p:sp>
       <p:sp>
         <p:nvSpPr>
-          <p:cNvPr id="9" name="TextBox 8"/>
+          <p:cNvPr id="7" name="TextBox 6"/>
           <p:cNvSpPr txBox="1"/>
           <p:nvPr/>
         </p:nvSpPr>
         <p:spPr>
           <a:xfrm>
-            <a:off x="6199632" y="2430475"/>
-            <a:ext cx="5440680" cy="1190548"/>
+            <a:off x="868680" y="5559552"/>
+            <a:ext cx="10607040" cy="320040"/>
           </a:xfrm>
           <a:prstGeom prst="rect">
             <a:avLst/>
@@ -9567,38 +8102,38 @@
           <a:noFill/>
         </p:spPr>
         <p:txBody>
-          <a:bodyPr wrap="square" anchor="ctr">
+          <a:bodyPr wrap="square" anchor="t">
             <a:spAutoFit/>
           </a:bodyPr>
           <a:lstStyle/>
           <a:p>
-            <a:pPr algn="ctr">
+            <a:pPr algn="l">
               <a:lnSpc>
                 <a:spcPct val="100000"/>
               </a:lnSpc>
             </a:pPr>
             <a:r>
-              <a:rPr sz="4600" b="1" i="0">
-                <a:solidFill>
-                  <a:srgbClr val="C0392B"/>
-                </a:solidFill>
-                <a:latin typeface="Arial"/>
-              </a:rPr>
-              <a:t>0 = stop</a:t>
-            </a:r>
-          </a:p>
-        </p:txBody>
-      </p:sp>
-      <p:sp>
-        <p:nvSpPr>
-          <p:cNvPr id="10" name="TextBox 9"/>
+              <a:rPr sz="1500" b="1" i="0">
+                <a:solidFill>
+                  <a:srgbClr val="E08600"/>
+                </a:solidFill>
+                <a:latin typeface="Arial"/>
+              </a:rPr>
+              <a:t>Conclusion</a:t>
+            </a:r>
+          </a:p>
+        </p:txBody>
+      </p:sp>
+      <p:sp>
+        <p:nvSpPr>
+          <p:cNvPr id="8" name="TextBox 7"/>
           <p:cNvSpPr txBox="1"/>
           <p:nvPr/>
         </p:nvSpPr>
         <p:spPr>
           <a:xfrm>
-            <a:off x="6199632" y="3479292"/>
-            <a:ext cx="5440680" cy="623620"/>
+            <a:off x="868680" y="5879592"/>
+            <a:ext cx="10607040" cy="457200"/>
           </a:xfrm>
           <a:prstGeom prst="rect">
             <a:avLst/>
@@ -9611,231 +8146,26 @@
           </a:bodyPr>
           <a:lstStyle/>
           <a:p>
-            <a:pPr algn="ctr">
+            <a:pPr algn="l">
               <a:lnSpc>
                 <a:spcPct val="100000"/>
               </a:lnSpc>
             </a:pPr>
             <a:r>
-              <a:rPr sz="1700" b="1" i="0">
+              <a:rPr sz="1800" b="1" i="0">
                 <a:solidFill>
                   <a:srgbClr val="1A1A1A"/>
                 </a:solidFill>
                 <a:latin typeface="Arial"/>
               </a:rPr>
-              <a:t>silent-failure guard</a:t>
-            </a:r>
-          </a:p>
-        </p:txBody>
-      </p:sp>
-      <p:sp>
-        <p:nvSpPr>
-          <p:cNvPr id="11" name="TextBox 10"/>
-          <p:cNvSpPr txBox="1"/>
-          <p:nvPr/>
-        </p:nvSpPr>
-        <p:spPr>
-          <a:xfrm>
-            <a:off x="6199632" y="4074566"/>
-            <a:ext cx="5440680" cy="566928"/>
-          </a:xfrm>
-          <a:prstGeom prst="rect">
-            <a:avLst/>
-          </a:prstGeom>
-          <a:noFill/>
-        </p:spPr>
-        <p:txBody>
-          <a:bodyPr wrap="square" anchor="t">
-            <a:spAutoFit/>
-          </a:bodyPr>
-          <a:lstStyle/>
-          <a:p>
-            <a:pPr algn="ctr">
-              <a:lnSpc>
-                <a:spcPct val="100000"/>
-              </a:lnSpc>
-            </a:pPr>
-            <a:r>
-              <a:rPr sz="1250" b="0" i="1">
-                <a:solidFill>
-                  <a:srgbClr val="6B7280"/>
-                </a:solidFill>
-                <a:latin typeface="Arial"/>
-              </a:rPr>
-              <a:t>abort if no valid silver</a:t>
-            </a:r>
-          </a:p>
-        </p:txBody>
-      </p:sp>
-      <p:sp>
-        <p:nvSpPr>
-          <p:cNvPr id="12" name="Rectangle 11"/>
-          <p:cNvSpPr/>
-          <p:nvPr/>
-        </p:nvSpPr>
-        <p:spPr>
-          <a:xfrm>
-            <a:off x="548640" y="5486400"/>
-            <a:ext cx="11091672" cy="914400"/>
-          </a:xfrm>
-          <a:prstGeom prst="rect">
-            <a:avLst/>
-          </a:prstGeom>
-          <a:solidFill>
-            <a:srgbClr val="FFF6D6"/>
-          </a:solidFill>
-          <a:ln>
-            <a:noFill/>
-          </a:ln>
-          <a:effectLst/>
-        </p:spPr>
-        <p:style>
-          <a:lnRef idx="1">
-            <a:schemeClr val="accent1"/>
-          </a:lnRef>
-          <a:fillRef idx="3">
-            <a:schemeClr val="accent1"/>
-          </a:fillRef>
-          <a:effectRef idx="2">
-            <a:schemeClr val="accent1"/>
-          </a:effectRef>
-          <a:fontRef idx="minor">
-            <a:schemeClr val="lt1"/>
-          </a:fontRef>
-        </p:style>
-        <p:txBody>
-          <a:bodyPr rtlCol="0" anchor="ctr"/>
-          <a:lstStyle/>
-          <a:p>
-            <a:pPr algn="ctr"/>
-          </a:p>
-        </p:txBody>
-      </p:sp>
-      <p:sp>
-        <p:nvSpPr>
-          <p:cNvPr id="13" name="Rectangle 12"/>
-          <p:cNvSpPr/>
-          <p:nvPr/>
-        </p:nvSpPr>
-        <p:spPr>
-          <a:xfrm>
-            <a:off x="548640" y="5486400"/>
-            <a:ext cx="118872" cy="914400"/>
-          </a:xfrm>
-          <a:prstGeom prst="rect">
-            <a:avLst/>
-          </a:prstGeom>
-          <a:solidFill>
-            <a:srgbClr val="F0A500"/>
-          </a:solidFill>
-          <a:ln>
-            <a:noFill/>
-          </a:ln>
-          <a:effectLst/>
-        </p:spPr>
-        <p:style>
-          <a:lnRef idx="1">
-            <a:schemeClr val="accent1"/>
-          </a:lnRef>
-          <a:fillRef idx="3">
-            <a:schemeClr val="accent1"/>
-          </a:fillRef>
-          <a:effectRef idx="2">
-            <a:schemeClr val="accent1"/>
-          </a:effectRef>
-          <a:fontRef idx="minor">
-            <a:schemeClr val="lt1"/>
-          </a:fontRef>
-        </p:style>
-        <p:txBody>
-          <a:bodyPr rtlCol="0" anchor="ctr"/>
-          <a:lstStyle/>
-          <a:p>
-            <a:pPr algn="ctr"/>
-          </a:p>
-        </p:txBody>
-      </p:sp>
-      <p:sp>
-        <p:nvSpPr>
-          <p:cNvPr id="14" name="TextBox 13"/>
-          <p:cNvSpPr txBox="1"/>
-          <p:nvPr/>
-        </p:nvSpPr>
-        <p:spPr>
-          <a:xfrm>
-            <a:off x="868680" y="5596128"/>
-            <a:ext cx="10607040" cy="320040"/>
-          </a:xfrm>
-          <a:prstGeom prst="rect">
-            <a:avLst/>
-          </a:prstGeom>
-          <a:noFill/>
-        </p:spPr>
-        <p:txBody>
-          <a:bodyPr wrap="square" anchor="t">
-            <a:spAutoFit/>
-          </a:bodyPr>
-          <a:lstStyle/>
-          <a:p>
-            <a:pPr algn="l">
-              <a:lnSpc>
-                <a:spcPct val="100000"/>
-              </a:lnSpc>
-            </a:pPr>
-            <a:r>
-              <a:rPr sz="1500" b="1" i="0">
-                <a:solidFill>
-                  <a:srgbClr val="E08600"/>
-                </a:solidFill>
-                <a:latin typeface="Arial"/>
-              </a:rPr>
-              <a:t>Takeaway</a:t>
-            </a:r>
-          </a:p>
-        </p:txBody>
-      </p:sp>
-      <p:sp>
-        <p:nvSpPr>
-          <p:cNvPr id="15" name="TextBox 14"/>
-          <p:cNvSpPr txBox="1"/>
-          <p:nvPr/>
-        </p:nvSpPr>
-        <p:spPr>
-          <a:xfrm>
-            <a:off x="868680" y="5907024"/>
-            <a:ext cx="10607040" cy="457200"/>
-          </a:xfrm>
-          <a:prstGeom prst="rect">
-            <a:avLst/>
-          </a:prstGeom>
-          <a:noFill/>
-        </p:spPr>
-        <p:txBody>
-          <a:bodyPr wrap="square" anchor="t">
-            <a:spAutoFit/>
-          </a:bodyPr>
-          <a:lstStyle/>
-          <a:p>
-            <a:pPr algn="l">
-              <a:lnSpc>
-                <a:spcPct val="100000"/>
-              </a:lnSpc>
-            </a:pPr>
-            <a:r>
-              <a:rPr sz="1800" b="1" i="0">
-                <a:solidFill>
-                  <a:srgbClr val="1A1A1A"/>
-                </a:solidFill>
-                <a:latin typeface="Arial"/>
-              </a:rPr>
-              <a:t>A 404 once made silver empty and training silently fell back to gold-only — now the pipeline aborts.</a:t>
-            </a:r>
-          </a:p>
-        </p:txBody>
-      </p:sp>
-      <p:sp>
-        <p:nvSpPr>
-          <p:cNvPr id="16" name="TextBox 15"/>
+              <a:t>Cheaper labeling + a fail-loud pipeline that never degrades silently.</a:t>
+            </a:r>
+          </a:p>
+        </p:txBody>
+      </p:sp>
+      <p:sp>
+        <p:nvSpPr>
+          <p:cNvPr id="9" name="TextBox 8"/>
           <p:cNvSpPr txBox="1"/>
           <p:nvPr/>
         </p:nvSpPr>

--- a/docs/KD_group_meeting_20260629.pptx
+++ b/docs/KD_group_meeting_20260629.pptx
@@ -3316,6 +3316,41 @@
           </a:p>
         </p:txBody>
       </p:sp>
+      <p:sp>
+        <p:nvSpPr>
+          <p:cNvPr id="7" name="TextBox 6"/>
+          <p:cNvSpPr txBox="1"/>
+          <p:nvPr/>
+        </p:nvSpPr>
+        <p:spPr>
+          <a:xfrm>
+            <a:off x="73152" y="18288"/>
+            <a:ext cx="12045391" cy="274320"/>
+          </a:xfrm>
+          <a:prstGeom prst="rect">
+            <a:avLst/>
+          </a:prstGeom>
+          <a:noFill/>
+        </p:spPr>
+        <p:txBody>
+          <a:bodyPr wrap="none" lIns="36576" rIns="36576" tIns="0" bIns="0" anchor="ctr">
+            <a:spAutoFit/>
+          </a:bodyPr>
+          <a:lstStyle/>
+          <a:p>
+            <a:pPr algn="ctr"/>
+            <a:r>
+              <a:rPr sz="1000" b="1">
+                <a:solidFill>
+                  <a:srgbClr val="B91C1C"/>
+                </a:solidFill>
+                <a:latin typeface="Aptos"/>
+              </a:rPr>
+              <a:t>HISTORICAL DECK — superseded by the locked 2026-07-18 evidence; do not cite cross-split SOTA or universal KD claims</a:t>
+            </a:r>
+          </a:p>
+        </p:txBody>
+      </p:sp>
     </p:spTree>
   </p:cSld>
   <p:clrMapOvr>
@@ -3840,6 +3875,41 @@
           </a:p>
         </p:txBody>
       </p:sp>
+      <p:sp>
+        <p:nvSpPr>
+          <p:cNvPr id="12" name="TextBox 11"/>
+          <p:cNvSpPr txBox="1"/>
+          <p:nvPr/>
+        </p:nvSpPr>
+        <p:spPr>
+          <a:xfrm>
+            <a:off x="73152" y="18288"/>
+            <a:ext cx="12045391" cy="274320"/>
+          </a:xfrm>
+          <a:prstGeom prst="rect">
+            <a:avLst/>
+          </a:prstGeom>
+          <a:noFill/>
+        </p:spPr>
+        <p:txBody>
+          <a:bodyPr wrap="none" lIns="36576" rIns="36576" tIns="0" bIns="0" anchor="ctr">
+            <a:spAutoFit/>
+          </a:bodyPr>
+          <a:lstStyle/>
+          <a:p>
+            <a:pPr algn="ctr"/>
+            <a:r>
+              <a:rPr sz="1000" b="1">
+                <a:solidFill>
+                  <a:srgbClr val="B91C1C"/>
+                </a:solidFill>
+                <a:latin typeface="Aptos"/>
+              </a:rPr>
+              <a:t>HISTORICAL DECK — superseded by the locked 2026-07-18 evidence; do not cite cross-split SOTA or universal KD claims</a:t>
+            </a:r>
+          </a:p>
+        </p:txBody>
+      </p:sp>
     </p:spTree>
   </p:cSld>
   <p:clrMapOvr>
@@ -4272,6 +4342,41 @@
           </a:p>
         </p:txBody>
       </p:sp>
+      <p:sp>
+        <p:nvSpPr>
+          <p:cNvPr id="10" name="TextBox 9"/>
+          <p:cNvSpPr txBox="1"/>
+          <p:nvPr/>
+        </p:nvSpPr>
+        <p:spPr>
+          <a:xfrm>
+            <a:off x="73152" y="18288"/>
+            <a:ext cx="12045391" cy="274320"/>
+          </a:xfrm>
+          <a:prstGeom prst="rect">
+            <a:avLst/>
+          </a:prstGeom>
+          <a:noFill/>
+        </p:spPr>
+        <p:txBody>
+          <a:bodyPr wrap="none" lIns="36576" rIns="36576" tIns="0" bIns="0" anchor="ctr">
+            <a:spAutoFit/>
+          </a:bodyPr>
+          <a:lstStyle/>
+          <a:p>
+            <a:pPr algn="ctr"/>
+            <a:r>
+              <a:rPr sz="1000" b="1">
+                <a:solidFill>
+                  <a:srgbClr val="B91C1C"/>
+                </a:solidFill>
+                <a:latin typeface="Aptos"/>
+              </a:rPr>
+              <a:t>HISTORICAL DECK — superseded by the locked 2026-07-18 evidence; do not cite cross-split SOTA or universal KD claims</a:t>
+            </a:r>
+          </a:p>
+        </p:txBody>
+      </p:sp>
     </p:spTree>
   </p:cSld>
   <p:clrMapOvr>
@@ -4753,6 +4858,41 @@
           </a:p>
         </p:txBody>
       </p:sp>
+      <p:sp>
+        <p:nvSpPr>
+          <p:cNvPr id="10" name="TextBox 9"/>
+          <p:cNvSpPr txBox="1"/>
+          <p:nvPr/>
+        </p:nvSpPr>
+        <p:spPr>
+          <a:xfrm>
+            <a:off x="73152" y="18288"/>
+            <a:ext cx="12045391" cy="274320"/>
+          </a:xfrm>
+          <a:prstGeom prst="rect">
+            <a:avLst/>
+          </a:prstGeom>
+          <a:noFill/>
+        </p:spPr>
+        <p:txBody>
+          <a:bodyPr wrap="none" lIns="36576" rIns="36576" tIns="0" bIns="0" anchor="ctr">
+            <a:spAutoFit/>
+          </a:bodyPr>
+          <a:lstStyle/>
+          <a:p>
+            <a:pPr algn="ctr"/>
+            <a:r>
+              <a:rPr sz="1000" b="1">
+                <a:solidFill>
+                  <a:srgbClr val="B91C1C"/>
+                </a:solidFill>
+                <a:latin typeface="Aptos"/>
+              </a:rPr>
+              <a:t>HISTORICAL DECK — superseded by the locked 2026-07-18 evidence; do not cite cross-split SOTA or universal KD claims</a:t>
+            </a:r>
+          </a:p>
+        </p:txBody>
+      </p:sp>
     </p:spTree>
   </p:cSld>
   <p:clrMapOvr>
@@ -5294,6 +5434,41 @@
                 <a:latin typeface="Arial"/>
               </a:rPr>
               <a:t>4</a:t>
+            </a:r>
+          </a:p>
+        </p:txBody>
+      </p:sp>
+      <p:sp>
+        <p:nvSpPr>
+          <p:cNvPr id="8" name="TextBox 7"/>
+          <p:cNvSpPr txBox="1"/>
+          <p:nvPr/>
+        </p:nvSpPr>
+        <p:spPr>
+          <a:xfrm>
+            <a:off x="73152" y="18288"/>
+            <a:ext cx="12045391" cy="274320"/>
+          </a:xfrm>
+          <a:prstGeom prst="rect">
+            <a:avLst/>
+          </a:prstGeom>
+          <a:noFill/>
+        </p:spPr>
+        <p:txBody>
+          <a:bodyPr wrap="none" lIns="36576" rIns="36576" tIns="0" bIns="0" anchor="ctr">
+            <a:spAutoFit/>
+          </a:bodyPr>
+          <a:lstStyle/>
+          <a:p>
+            <a:pPr algn="ctr"/>
+            <a:r>
+              <a:rPr sz="1000" b="1">
+                <a:solidFill>
+                  <a:srgbClr val="B91C1C"/>
+                </a:solidFill>
+                <a:latin typeface="Aptos"/>
+              </a:rPr>
+              <a:t>HISTORICAL DECK — superseded by the locked 2026-07-18 evidence; do not cite cross-split SOTA or universal KD claims</a:t>
             </a:r>
           </a:p>
         </p:txBody>
@@ -6191,6 +6366,41 @@
           </a:p>
         </p:txBody>
       </p:sp>
+      <p:sp>
+        <p:nvSpPr>
+          <p:cNvPr id="10" name="TextBox 9"/>
+          <p:cNvSpPr txBox="1"/>
+          <p:nvPr/>
+        </p:nvSpPr>
+        <p:spPr>
+          <a:xfrm>
+            <a:off x="73152" y="18288"/>
+            <a:ext cx="12045391" cy="274320"/>
+          </a:xfrm>
+          <a:prstGeom prst="rect">
+            <a:avLst/>
+          </a:prstGeom>
+          <a:noFill/>
+        </p:spPr>
+        <p:txBody>
+          <a:bodyPr wrap="none" lIns="36576" rIns="36576" tIns="0" bIns="0" anchor="ctr">
+            <a:spAutoFit/>
+          </a:bodyPr>
+          <a:lstStyle/>
+          <a:p>
+            <a:pPr algn="ctr"/>
+            <a:r>
+              <a:rPr sz="1000" b="1">
+                <a:solidFill>
+                  <a:srgbClr val="B91C1C"/>
+                </a:solidFill>
+                <a:latin typeface="Aptos"/>
+              </a:rPr>
+              <a:t>HISTORICAL DECK — superseded by the locked 2026-07-18 evidence; do not cite cross-split SOTA or universal KD claims</a:t>
+            </a:r>
+          </a:p>
+        </p:txBody>
+      </p:sp>
     </p:spTree>
   </p:cSld>
   <p:clrMapOvr>
@@ -6632,6 +6842,41 @@
           </a:p>
         </p:txBody>
       </p:sp>
+      <p:sp>
+        <p:nvSpPr>
+          <p:cNvPr id="10" name="TextBox 9"/>
+          <p:cNvSpPr txBox="1"/>
+          <p:nvPr/>
+        </p:nvSpPr>
+        <p:spPr>
+          <a:xfrm>
+            <a:off x="73152" y="18288"/>
+            <a:ext cx="12045391" cy="274320"/>
+          </a:xfrm>
+          <a:prstGeom prst="rect">
+            <a:avLst/>
+          </a:prstGeom>
+          <a:noFill/>
+        </p:spPr>
+        <p:txBody>
+          <a:bodyPr wrap="none" lIns="36576" rIns="36576" tIns="0" bIns="0" anchor="ctr">
+            <a:spAutoFit/>
+          </a:bodyPr>
+          <a:lstStyle/>
+          <a:p>
+            <a:pPr algn="ctr"/>
+            <a:r>
+              <a:rPr sz="1000" b="1">
+                <a:solidFill>
+                  <a:srgbClr val="B91C1C"/>
+                </a:solidFill>
+                <a:latin typeface="Aptos"/>
+              </a:rPr>
+              <a:t>HISTORICAL DECK — superseded by the locked 2026-07-18 evidence; do not cite cross-split SOTA or universal KD claims</a:t>
+            </a:r>
+          </a:p>
+        </p:txBody>
+      </p:sp>
     </p:spTree>
   </p:cSld>
   <p:clrMapOvr>
@@ -7095,6 +7340,41 @@
           </a:p>
         </p:txBody>
       </p:sp>
+      <p:sp>
+        <p:nvSpPr>
+          <p:cNvPr id="10" name="TextBox 9"/>
+          <p:cNvSpPr txBox="1"/>
+          <p:nvPr/>
+        </p:nvSpPr>
+        <p:spPr>
+          <a:xfrm>
+            <a:off x="73152" y="18288"/>
+            <a:ext cx="12045391" cy="274320"/>
+          </a:xfrm>
+          <a:prstGeom prst="rect">
+            <a:avLst/>
+          </a:prstGeom>
+          <a:noFill/>
+        </p:spPr>
+        <p:txBody>
+          <a:bodyPr wrap="none" lIns="36576" rIns="36576" tIns="0" bIns="0" anchor="ctr">
+            <a:spAutoFit/>
+          </a:bodyPr>
+          <a:lstStyle/>
+          <a:p>
+            <a:pPr algn="ctr"/>
+            <a:r>
+              <a:rPr sz="1000" b="1">
+                <a:solidFill>
+                  <a:srgbClr val="B91C1C"/>
+                </a:solidFill>
+                <a:latin typeface="Aptos"/>
+              </a:rPr>
+              <a:t>HISTORICAL DECK — superseded by the locked 2026-07-18 evidence; do not cite cross-split SOTA or universal KD claims</a:t>
+            </a:r>
+          </a:p>
+        </p:txBody>
+      </p:sp>
     </p:spTree>
   </p:cSld>
   <p:clrMapOvr>
@@ -7770,6 +8050,41 @@
           </a:p>
         </p:txBody>
       </p:sp>
+      <p:sp>
+        <p:nvSpPr>
+          <p:cNvPr id="15" name="TextBox 14"/>
+          <p:cNvSpPr txBox="1"/>
+          <p:nvPr/>
+        </p:nvSpPr>
+        <p:spPr>
+          <a:xfrm>
+            <a:off x="73152" y="18288"/>
+            <a:ext cx="12045391" cy="274320"/>
+          </a:xfrm>
+          <a:prstGeom prst="rect">
+            <a:avLst/>
+          </a:prstGeom>
+          <a:noFill/>
+        </p:spPr>
+        <p:txBody>
+          <a:bodyPr wrap="none" lIns="36576" rIns="36576" tIns="0" bIns="0" anchor="ctr">
+            <a:spAutoFit/>
+          </a:bodyPr>
+          <a:lstStyle/>
+          <a:p>
+            <a:pPr algn="ctr"/>
+            <a:r>
+              <a:rPr sz="1000" b="1">
+                <a:solidFill>
+                  <a:srgbClr val="B91C1C"/>
+                </a:solidFill>
+                <a:latin typeface="Aptos"/>
+              </a:rPr>
+              <a:t>HISTORICAL DECK — superseded by the locked 2026-07-18 evidence; do not cite cross-split SOTA or universal KD claims</a:t>
+            </a:r>
+          </a:p>
+        </p:txBody>
+      </p:sp>
     </p:spTree>
   </p:cSld>
   <p:clrMapOvr>
@@ -8198,6 +8513,41 @@
                 <a:latin typeface="Arial"/>
               </a:rPr>
               <a:t>9</a:t>
+            </a:r>
+          </a:p>
+        </p:txBody>
+      </p:sp>
+      <p:sp>
+        <p:nvSpPr>
+          <p:cNvPr id="10" name="TextBox 9"/>
+          <p:cNvSpPr txBox="1"/>
+          <p:nvPr/>
+        </p:nvSpPr>
+        <p:spPr>
+          <a:xfrm>
+            <a:off x="73152" y="18288"/>
+            <a:ext cx="12045391" cy="274320"/>
+          </a:xfrm>
+          <a:prstGeom prst="rect">
+            <a:avLst/>
+          </a:prstGeom>
+          <a:noFill/>
+        </p:spPr>
+        <p:txBody>
+          <a:bodyPr wrap="none" lIns="36576" rIns="36576" tIns="0" bIns="0" anchor="ctr">
+            <a:spAutoFit/>
+          </a:bodyPr>
+          <a:lstStyle/>
+          <a:p>
+            <a:pPr algn="ctr"/>
+            <a:r>
+              <a:rPr sz="1000" b="1">
+                <a:solidFill>
+                  <a:srgbClr val="B91C1C"/>
+                </a:solidFill>
+                <a:latin typeface="Aptos"/>
+              </a:rPr>
+              <a:t>HISTORICAL DECK — superseded by the locked 2026-07-18 evidence; do not cite cross-split SOTA or universal KD claims</a:t>
             </a:r>
           </a:p>
         </p:txBody>
